--- a/brief_e/1026percent.pptx
+++ b/brief_e/1026percent.pptx
@@ -6,9 +6,14 @@
   </p:sldMasterIdLst>
   <p:sldIdLst>
     <p:sldId id="256" r:id="rId2"/>
+    <p:sldId id="257" r:id="rId3"/>
+    <p:sldId id="258" r:id="rId4"/>
+    <p:sldId id="259" r:id="rId5"/>
+    <p:sldId id="260" r:id="rId6"/>
+    <p:sldId id="261" r:id="rId7"/>
   </p:sldIdLst>
   <p:notesMasterIdLst>
-    <p:notesMasterId r:id="rId3"/>
+    <p:notesMasterId r:id="rId8"/>
   </p:notesMasterIdLst>
   <p:sldSz cx="12191695" cy="6858000"/>
   <p:notesSz cx="6858000" cy="12191695"/>
@@ -22,12 +27,16 @@
       <p:regular r:id="rId201315"/>
     </p:embeddedFont>
     <p:embeddedFont>
-      <p:font typeface="Mozilla Text SemiBold"/>
+      <p:font typeface="Mozilla Text Medium"/>
       <p:regular r:id="rId201316"/>
     </p:embeddedFont>
     <p:embeddedFont>
+      <p:font typeface="Mozilla Text SemiBold"/>
+      <p:regular r:id="rId201317"/>
+    </p:embeddedFont>
+    <p:embeddedFont>
       <p:font typeface="Mozilla Text Bold"/>
-      <p:regular r:id="rId201317"/>
+      <p:regular r:id="rId201318"/>
     </p:embeddedFont>
   </p:embeddedFontLst>
   <p:defaultTextStyle>
@@ -544,6 +553,449 @@
             <a:fld id="{F7021451-1387-4CA6-816F-3879F97B5CBC}" type="slidenum">
               <a:rPr lang="en-US"/>
               <a:t>1</a:t>
+            </a:fld>
+            <a:endParaRPr lang="en-US"/>
+          </a:p>
+        </p:txBody>
+      </p:sp>
+    </p:spTree>
+    <p:extLst>
+      <p:ext uri="{BB962C8B-B14F-4D97-AF65-F5344CB8AC3E}">
+        <p14:creationId xmlns:p14="http://schemas.microsoft.com/office/powerpoint/2010/main" val="1024086991"/>
+      </p:ext>
+    </p:extLst>
+  </p:cSld>
+  <p:clrMapOvr>
+    <a:masterClrMapping/>
+  </p:clrMapOvr>
+</p:notes>
+</file>
+
+<file path=ppt/notesSlides/notesSlide2.xml><?xml version="1.0" encoding="utf-8"?>
+<p:notes xmlns:a="http://schemas.openxmlformats.org/drawingml/2006/main" xmlns:r="http://schemas.openxmlformats.org/officeDocument/2006/relationships" xmlns:p="http://schemas.openxmlformats.org/presentationml/2006/main">
+  <p:cSld>
+    <p:spTree>
+      <p:nvGrpSpPr>
+        <p:cNvPr id="1" name=""/>
+        <p:cNvGrpSpPr/>
+        <p:nvPr/>
+      </p:nvGrpSpPr>
+      <p:grpSpPr>
+        <a:xfrm>
+          <a:off x="0" y="0"/>
+          <a:ext cx="0" cy="0"/>
+          <a:chOff x="0" y="0"/>
+          <a:chExt cx="0" cy="0"/>
+        </a:xfrm>
+      </p:grpSpPr>
+      <p:sp>
+        <p:nvSpPr>
+          <p:cNvPr id="2" name="Slide Image Placeholder 1"/>
+          <p:cNvSpPr>
+            <a:spLocks noGrp="1" noRot="1" noChangeAspect="1"/>
+          </p:cNvSpPr>
+          <p:nvPr>
+            <p:ph type="sldImg"/>
+          </p:nvPr>
+        </p:nvSpPr>
+        <p:spPr/>
+      </p:sp>
+      <p:sp>
+        <p:nvSpPr>
+          <p:cNvPr id="3" name="Notes Placeholder 2"/>
+          <p:cNvSpPr>
+            <a:spLocks noGrp="1"/>
+          </p:cNvSpPr>
+          <p:nvPr>
+            <p:ph type="body" idx="1"/>
+          </p:nvPr>
+        </p:nvSpPr>
+        <p:spPr/>
+        <p:txBody>
+          <a:bodyPr/>
+          <a:lstStyle/>
+          <a:p>
+            <a:r>
+              <a:rPr lang="en-US" dirty="0"/>
+              <a:t>Explain that the analysis joins three lenses. First, compare volume. Second, distinguish unique bookings from tests and isolate campaign-waiver bookings. Third, connect new-patient campaign activity to tests and revenue. The source did not include the original Python code, so do not overstate the preparation logic.</a:t>
+            </a:r>
+            <a:endParaRPr lang="en-US" dirty="0"/>
+          </a:p>
+        </p:txBody>
+      </p:sp>
+      <p:sp>
+        <p:nvSpPr>
+          <p:cNvPr id="4" name="Slide Number Placeholder 3"/>
+          <p:cNvSpPr>
+            <a:spLocks noGrp="1"/>
+          </p:cNvSpPr>
+          <p:nvPr>
+            <p:ph type="sldNum" sz="quarter" idx="10"/>
+          </p:nvPr>
+        </p:nvSpPr>
+        <p:spPr/>
+        <p:txBody>
+          <a:bodyPr/>
+          <a:lstStyle/>
+          <a:p>
+            <a:fld id="{F7021451-1387-4CA6-816F-3879F97B5CBC}" type="slidenum">
+              <a:rPr lang="en-US"/>
+              <a:t>2</a:t>
+            </a:fld>
+            <a:endParaRPr lang="en-US"/>
+          </a:p>
+        </p:txBody>
+      </p:sp>
+    </p:spTree>
+    <p:extLst>
+      <p:ext uri="{BB962C8B-B14F-4D97-AF65-F5344CB8AC3E}">
+        <p14:creationId xmlns:p14="http://schemas.microsoft.com/office/powerpoint/2010/main" val="1024086991"/>
+      </p:ext>
+    </p:extLst>
+  </p:cSld>
+  <p:clrMapOvr>
+    <a:masterClrMapping/>
+  </p:clrMapOvr>
+</p:notes>
+</file>
+
+<file path=ppt/notesSlides/notesSlide3.xml><?xml version="1.0" encoding="utf-8"?>
+<p:notes xmlns:a="http://schemas.openxmlformats.org/drawingml/2006/main" xmlns:r="http://schemas.openxmlformats.org/officeDocument/2006/relationships" xmlns:p="http://schemas.openxmlformats.org/presentationml/2006/main">
+  <p:cSld>
+    <p:spTree>
+      <p:nvGrpSpPr>
+        <p:cNvPr id="1" name=""/>
+        <p:cNvGrpSpPr/>
+        <p:nvPr/>
+      </p:nvGrpSpPr>
+      <p:grpSpPr>
+        <a:xfrm>
+          <a:off x="0" y="0"/>
+          <a:ext cx="0" cy="0"/>
+          <a:chOff x="0" y="0"/>
+          <a:chExt cx="0" cy="0"/>
+        </a:xfrm>
+      </p:grpSpPr>
+      <p:sp>
+        <p:nvSpPr>
+          <p:cNvPr id="2" name="Slide Image Placeholder 1"/>
+          <p:cNvSpPr>
+            <a:spLocks noGrp="1" noRot="1" noChangeAspect="1"/>
+          </p:cNvSpPr>
+          <p:nvPr>
+            <p:ph type="sldImg"/>
+          </p:nvPr>
+        </p:nvSpPr>
+        <p:spPr/>
+      </p:sp>
+      <p:sp>
+        <p:nvSpPr>
+          <p:cNvPr id="3" name="Notes Placeholder 2"/>
+          <p:cNvSpPr>
+            <a:spLocks noGrp="1"/>
+          </p:cNvSpPr>
+          <p:nvPr>
+            <p:ph type="body" idx="1"/>
+          </p:nvPr>
+        </p:nvSpPr>
+        <p:spPr/>
+        <p:txBody>
+          <a:bodyPr/>
+          <a:lstStyle/>
+          <a:p>
+            <a:r>
+              <a:rPr lang="en-US" dirty="0"/>
+              <a:t>The chart shows the headline result directly: Q1 2026 reached 33,849 tests versus 30,700 in Q1 2025, an increase of 3,149 tests or 10.26%. The result tells us that demand rose, not why it rose.
+Source: q1-2025-test-volume-wfbz79hg.</a:t>
+            </a:r>
+            <a:endParaRPr lang="en-US" dirty="0"/>
+          </a:p>
+        </p:txBody>
+      </p:sp>
+      <p:sp>
+        <p:nvSpPr>
+          <p:cNvPr id="4" name="Slide Number Placeholder 3"/>
+          <p:cNvSpPr>
+            <a:spLocks noGrp="1"/>
+          </p:cNvSpPr>
+          <p:nvPr>
+            <p:ph type="sldNum" sz="quarter" idx="10"/>
+          </p:nvPr>
+        </p:nvSpPr>
+        <p:spPr/>
+        <p:txBody>
+          <a:bodyPr/>
+          <a:lstStyle/>
+          <a:p>
+            <a:fld id="{F7021451-1387-4CA6-816F-3879F97B5CBC}" type="slidenum">
+              <a:rPr lang="en-US"/>
+              <a:t>3</a:t>
+            </a:fld>
+            <a:endParaRPr lang="en-US"/>
+          </a:p>
+        </p:txBody>
+      </p:sp>
+    </p:spTree>
+    <p:extLst>
+      <p:ext uri="{BB962C8B-B14F-4D97-AF65-F5344CB8AC3E}">
+        <p14:creationId xmlns:p14="http://schemas.microsoft.com/office/powerpoint/2010/main" val="1024086991"/>
+      </p:ext>
+    </p:extLst>
+  </p:cSld>
+  <p:clrMapOvr>
+    <a:masterClrMapping/>
+  </p:clrMapOvr>
+</p:notes>
+</file>
+
+<file path=ppt/notesSlides/notesSlide4.xml><?xml version="1.0" encoding="utf-8"?>
+<p:notes xmlns:a="http://schemas.openxmlformats.org/drawingml/2006/main" xmlns:r="http://schemas.openxmlformats.org/officeDocument/2006/relationships" xmlns:p="http://schemas.openxmlformats.org/presentationml/2006/main">
+  <p:cSld>
+    <p:spTree>
+      <p:nvGrpSpPr>
+        <p:cNvPr id="1" name=""/>
+        <p:cNvGrpSpPr/>
+        <p:nvPr/>
+      </p:nvGrpSpPr>
+      <p:grpSpPr>
+        <a:xfrm>
+          <a:off x="0" y="0"/>
+          <a:ext cx="0" cy="0"/>
+          <a:chOff x="0" y="0"/>
+          <a:chExt cx="0" cy="0"/>
+        </a:xfrm>
+      </p:grpSpPr>
+      <p:sp>
+        <p:nvSpPr>
+          <p:cNvPr id="2" name="Slide Image Placeholder 1"/>
+          <p:cNvSpPr>
+            <a:spLocks noGrp="1" noRot="1" noChangeAspect="1"/>
+          </p:cNvSpPr>
+          <p:nvPr>
+            <p:ph type="sldImg"/>
+          </p:nvPr>
+        </p:nvSpPr>
+        <p:spPr/>
+      </p:sp>
+      <p:sp>
+        <p:nvSpPr>
+          <p:cNvPr id="3" name="Notes Placeholder 2"/>
+          <p:cNvSpPr>
+            <a:spLocks noGrp="1"/>
+          </p:cNvSpPr>
+          <p:nvPr>
+            <p:ph type="body" idx="1"/>
+          </p:nvPr>
+        </p:nvSpPr>
+        <p:spPr/>
+        <p:txBody>
+          <a:bodyPr/>
+          <a:lstStyle/>
+          <a:p>
+            <a:r>
+              <a:rPr lang="en-US" dirty="0"/>
+              <a:t>Use the donut to make the mix tangible. Campaign-waiver bookings account for 15,784 of 33,849 Q1 tests, or 46.63%. That is large enough to investigate seriously, but share of tests is still not the same as incremental impact.
+Source: q1-2025-test-volume-wfbz79hg.</a:t>
+            </a:r>
+            <a:endParaRPr lang="en-US" dirty="0"/>
+          </a:p>
+        </p:txBody>
+      </p:sp>
+      <p:sp>
+        <p:nvSpPr>
+          <p:cNvPr id="4" name="Slide Number Placeholder 3"/>
+          <p:cNvSpPr>
+            <a:spLocks noGrp="1"/>
+          </p:cNvSpPr>
+          <p:nvPr>
+            <p:ph type="sldNum" sz="quarter" idx="10"/>
+          </p:nvPr>
+        </p:nvSpPr>
+        <p:spPr/>
+        <p:txBody>
+          <a:bodyPr/>
+          <a:lstStyle/>
+          <a:p>
+            <a:fld id="{F7021451-1387-4CA6-816F-3879F97B5CBC}" type="slidenum">
+              <a:rPr lang="en-US"/>
+              <a:t>4</a:t>
+            </a:fld>
+            <a:endParaRPr lang="en-US"/>
+          </a:p>
+        </p:txBody>
+      </p:sp>
+    </p:spTree>
+    <p:extLst>
+      <p:ext uri="{BB962C8B-B14F-4D97-AF65-F5344CB8AC3E}">
+        <p14:creationId xmlns:p14="http://schemas.microsoft.com/office/powerpoint/2010/main" val="1024086991"/>
+      </p:ext>
+    </p:extLst>
+  </p:cSld>
+  <p:clrMapOvr>
+    <a:masterClrMapping/>
+  </p:clrMapOvr>
+</p:notes>
+</file>
+
+<file path=ppt/notesSlides/notesSlide5.xml><?xml version="1.0" encoding="utf-8"?>
+<p:notes xmlns:a="http://schemas.openxmlformats.org/drawingml/2006/main" xmlns:r="http://schemas.openxmlformats.org/officeDocument/2006/relationships" xmlns:p="http://schemas.openxmlformats.org/presentationml/2006/main">
+  <p:cSld>
+    <p:spTree>
+      <p:nvGrpSpPr>
+        <p:cNvPr id="1" name=""/>
+        <p:cNvGrpSpPr/>
+        <p:nvPr/>
+      </p:nvGrpSpPr>
+      <p:grpSpPr>
+        <a:xfrm>
+          <a:off x="0" y="0"/>
+          <a:ext cx="0" cy="0"/>
+          <a:chOff x="0" y="0"/>
+          <a:chExt cx="0" cy="0"/>
+        </a:xfrm>
+      </p:grpSpPr>
+      <p:sp>
+        <p:nvSpPr>
+          <p:cNvPr id="2" name="Slide Image Placeholder 1"/>
+          <p:cNvSpPr>
+            <a:spLocks noGrp="1" noRot="1" noChangeAspect="1"/>
+          </p:cNvSpPr>
+          <p:nvPr>
+            <p:ph type="sldImg"/>
+          </p:nvPr>
+        </p:nvSpPr>
+        <p:spPr/>
+      </p:sp>
+      <p:sp>
+        <p:nvSpPr>
+          <p:cNvPr id="3" name="Notes Placeholder 2"/>
+          <p:cNvSpPr>
+            <a:spLocks noGrp="1"/>
+          </p:cNvSpPr>
+          <p:nvPr>
+            <p:ph type="body" idx="1"/>
+          </p:nvPr>
+        </p:nvSpPr>
+        <p:spPr/>
+        <p:txBody>
+          <a:bodyPr/>
+          <a:lstStyle/>
+          <a:p>
+            <a:r>
+              <a:rPr lang="en-US" dirty="0"/>
+              <a:t>The campaign-linked revenue total is meaningful, and the new-patient contribution is specific. But attribution alone cannot show lift. The supplied analysis does not establish incremental revenue, profit, campaign cost, gross margin, retention, or ROI.
+Source: q1-2025-test-volume-wfbz79hg.</a:t>
+            </a:r>
+            <a:endParaRPr lang="en-US" dirty="0"/>
+          </a:p>
+        </p:txBody>
+      </p:sp>
+      <p:sp>
+        <p:nvSpPr>
+          <p:cNvPr id="4" name="Slide Number Placeholder 3"/>
+          <p:cNvSpPr>
+            <a:spLocks noGrp="1"/>
+          </p:cNvSpPr>
+          <p:nvPr>
+            <p:ph type="sldNum" sz="quarter" idx="10"/>
+          </p:nvPr>
+        </p:nvSpPr>
+        <p:spPr/>
+        <p:txBody>
+          <a:bodyPr/>
+          <a:lstStyle/>
+          <a:p>
+            <a:fld id="{F7021451-1387-4CA6-816F-3879F97B5CBC}" type="slidenum">
+              <a:rPr lang="en-US"/>
+              <a:t>5</a:t>
+            </a:fld>
+            <a:endParaRPr lang="en-US"/>
+          </a:p>
+        </p:txBody>
+      </p:sp>
+    </p:spTree>
+    <p:extLst>
+      <p:ext uri="{BB962C8B-B14F-4D97-AF65-F5344CB8AC3E}">
+        <p14:creationId xmlns:p14="http://schemas.microsoft.com/office/powerpoint/2010/main" val="1024086991"/>
+      </p:ext>
+    </p:extLst>
+  </p:cSld>
+  <p:clrMapOvr>
+    <a:masterClrMapping/>
+  </p:clrMapOvr>
+</p:notes>
+</file>
+
+<file path=ppt/notesSlides/notesSlide6.xml><?xml version="1.0" encoding="utf-8"?>
+<p:notes xmlns:a="http://schemas.openxmlformats.org/drawingml/2006/main" xmlns:r="http://schemas.openxmlformats.org/officeDocument/2006/relationships" xmlns:p="http://schemas.openxmlformats.org/presentationml/2006/main">
+  <p:cSld>
+    <p:spTree>
+      <p:nvGrpSpPr>
+        <p:cNvPr id="1" name=""/>
+        <p:cNvGrpSpPr/>
+        <p:nvPr/>
+      </p:nvGrpSpPr>
+      <p:grpSpPr>
+        <a:xfrm>
+          <a:off x="0" y="0"/>
+          <a:ext cx="0" cy="0"/>
+          <a:chOff x="0" y="0"/>
+          <a:chExt cx="0" cy="0"/>
+        </a:xfrm>
+      </p:grpSpPr>
+      <p:sp>
+        <p:nvSpPr>
+          <p:cNvPr id="2" name="Slide Image Placeholder 1"/>
+          <p:cNvSpPr>
+            <a:spLocks noGrp="1" noRot="1" noChangeAspect="1"/>
+          </p:cNvSpPr>
+          <p:nvPr>
+            <p:ph type="sldImg"/>
+          </p:nvPr>
+        </p:nvSpPr>
+        <p:spPr/>
+      </p:sp>
+      <p:sp>
+        <p:nvSpPr>
+          <p:cNvPr id="3" name="Notes Placeholder 2"/>
+          <p:cNvSpPr>
+            <a:spLocks noGrp="1"/>
+          </p:cNvSpPr>
+          <p:nvPr>
+            <p:ph type="body" idx="1"/>
+          </p:nvPr>
+        </p:nvSpPr>
+        <p:spPr/>
+        <p:txBody>
+          <a:bodyPr/>
+          <a:lstStyle/>
+          <a:p>
+            <a:r>
+              <a:rPr lang="en-US" dirty="0"/>
+              <a:t>Close with a practical next step, not a claim of causality. Validate the funnel, create a matched or holdout comparison, and add cost, margin, and retention to the next analysis. The campaign is large enough to optimize, but spend should scale only when incremental value is demonstrated.</a:t>
+            </a:r>
+            <a:endParaRPr lang="en-US" dirty="0"/>
+          </a:p>
+        </p:txBody>
+      </p:sp>
+      <p:sp>
+        <p:nvSpPr>
+          <p:cNvPr id="4" name="Slide Number Placeholder 3"/>
+          <p:cNvSpPr>
+            <a:spLocks noGrp="1"/>
+          </p:cNvSpPr>
+          <p:nvPr>
+            <p:ph type="sldNum" sz="quarter" idx="10"/>
+          </p:nvPr>
+        </p:nvSpPr>
+        <p:spPr/>
+        <p:txBody>
+          <a:bodyPr/>
+          <a:lstStyle/>
+          <a:p>
+            <a:fld id="{F7021451-1387-4CA6-816F-3879F97B5CBC}" type="slidenum">
+              <a:rPr lang="en-US"/>
+              <a:t>6</a:t>
             </a:fld>
             <a:endParaRPr lang="en-US"/>
           </a:p>
@@ -1189,6 +1641,2427 @@
 </p:sld>
 </file>
 
+<file path=ppt/slides/slide2.xml><?xml version="1.0" encoding="utf-8"?>
+<p:sld xmlns:a="http://schemas.openxmlformats.org/drawingml/2006/main" xmlns:r="http://schemas.openxmlformats.org/officeDocument/2006/relationships" xmlns:p="http://schemas.openxmlformats.org/presentationml/2006/main">
+  <p:cSld name="Slide 2">
+    <p:spTree>
+      <p:nvGrpSpPr>
+        <p:cNvPr id="1" name=""/>
+        <p:cNvGrpSpPr/>
+        <p:nvPr/>
+      </p:nvGrpSpPr>
+      <p:grpSpPr>
+        <a:xfrm>
+          <a:off x="0" y="0"/>
+          <a:ext cx="0" cy="0"/>
+          <a:chOff x="0" y="0"/>
+          <a:chExt cx="0" cy="0"/>
+        </a:xfrm>
+      </p:grpSpPr>
+      <p:sp>
+        <p:nvSpPr>
+          <p:cNvPr id="2" name="Text 0"/>
+          <p:cNvSpPr/>
+          <p:nvPr/>
+        </p:nvSpPr>
+        <p:spPr>
+          <a:xfrm>
+            <a:off x="609585" y="616268"/>
+            <a:ext cx="11582110" cy="220960"/>
+          </a:xfrm>
+          <a:prstGeom prst="rect">
+            <a:avLst/>
+          </a:prstGeom>
+          <a:noFill/>
+          <a:ln/>
+        </p:spPr>
+        <p:txBody>
+          <a:bodyPr wrap="none" lIns="0" tIns="0" rIns="0" bIns="0" rtlCol="0" anchor="t"/>
+          <a:lstStyle/>
+          <a:p>
+            <a:pPr algn="l" indent="0" marL="0">
+              <a:lnSpc>
+                <a:spcPct val="100000"/>
+              </a:lnSpc>
+              <a:buNone/>
+            </a:pPr>
+            <a:r>
+              <a:rPr lang="en-US" sz="1450" spc="29" kern="100" dirty="0">
+                <a:solidFill>
+                  <a:srgbClr val="F0609E"/>
+                </a:solidFill>
+                <a:latin typeface="Mozilla Text SemiBold" pitchFamily="34" charset="0"/>
+                <a:ea typeface="Mozilla Text SemiBold" pitchFamily="34" charset="-122"/>
+                <a:cs typeface="Mozilla Text SemiBold" pitchFamily="34" charset="0"/>
+              </a:rPr>
+              <a:t>ANALYSIS FRAME</a:t>
+            </a:r>
+            <a:endParaRPr lang="en-US" sz="1450" dirty="0"/>
+          </a:p>
+        </p:txBody>
+      </p:sp>
+      <p:sp>
+        <p:nvSpPr>
+          <p:cNvPr id="3" name="Text 1"/>
+          <p:cNvSpPr/>
+          <p:nvPr/>
+        </p:nvSpPr>
+        <p:spPr>
+          <a:xfrm>
+            <a:off x="609585" y="944834"/>
+            <a:ext cx="10972526" cy="987425"/>
+          </a:xfrm>
+          <a:prstGeom prst="rect">
+            <a:avLst/>
+          </a:prstGeom>
+          <a:noFill/>
+          <a:ln/>
+        </p:spPr>
+        <p:txBody>
+          <a:bodyPr wrap="square" lIns="0" tIns="0" rIns="0" bIns="0" rtlCol="0" anchor="t">
+            <a:normAutofit/>
+          </a:bodyPr>
+          <a:lstStyle/>
+          <a:p>
+            <a:pPr algn="l" indent="0" marL="0">
+              <a:lnSpc>
+                <a:spcPct val="90000"/>
+              </a:lnSpc>
+              <a:buNone/>
+            </a:pPr>
+            <a:r>
+              <a:rPr lang="en-US" sz="3600" b="1" spc="-18" kern="100" dirty="0">
+                <a:solidFill>
+                  <a:srgbClr val="F7F2E8"/>
+                </a:solidFill>
+                <a:latin typeface="Gantari Bold" pitchFamily="34" charset="0"/>
+                <a:ea typeface="Gantari Bold" pitchFamily="34" charset="-122"/>
+                <a:cs typeface="Gantari Bold" pitchFamily="34" charset="0"/>
+              </a:rPr>
+              <a:t>The analysis joins volume, bookings, and campaign-linked revenue</a:t>
+            </a:r>
+            <a:endParaRPr lang="en-US" sz="3600" dirty="0"/>
+          </a:p>
+        </p:txBody>
+      </p:sp>
+      <p:sp>
+        <p:nvSpPr>
+          <p:cNvPr id="4" name="Text 2"/>
+          <p:cNvSpPr/>
+          <p:nvPr/>
+        </p:nvSpPr>
+        <p:spPr>
+          <a:xfrm>
+            <a:off x="609585" y="2119610"/>
+            <a:ext cx="11582110" cy="360660"/>
+          </a:xfrm>
+          <a:prstGeom prst="rect">
+            <a:avLst/>
+          </a:prstGeom>
+          <a:noFill/>
+          <a:ln/>
+        </p:spPr>
+        <p:txBody>
+          <a:bodyPr wrap="none" lIns="0" tIns="0" rIns="0" bIns="0" rtlCol="0" anchor="t"/>
+          <a:lstStyle/>
+          <a:p>
+            <a:pPr algn="l" indent="0" marL="0">
+              <a:lnSpc>
+                <a:spcPct val="118000"/>
+              </a:lnSpc>
+              <a:buNone/>
+            </a:pPr>
+            <a:r>
+              <a:rPr lang="en-US" sz="2000" dirty="0">
+                <a:solidFill>
+                  <a:srgbClr val="F7F2E8"/>
+                </a:solidFill>
+                <a:latin typeface="Mozilla Text" pitchFamily="34" charset="0"/>
+                <a:ea typeface="Mozilla Text" pitchFamily="34" charset="-122"/>
+                <a:cs typeface="Mozilla Text" pitchFamily="34" charset="0"/>
+              </a:rPr>
+              <a:t>Three views are connected so the growth signal can be tested rather than assumed.</a:t>
+            </a:r>
+            <a:endParaRPr lang="en-US" sz="2000" dirty="0"/>
+          </a:p>
+        </p:txBody>
+      </p:sp>
+      <p:sp>
+        <p:nvSpPr>
+          <p:cNvPr id="5" name="Shape 3"/>
+          <p:cNvSpPr/>
+          <p:nvPr/>
+        </p:nvSpPr>
+        <p:spPr>
+          <a:xfrm>
+            <a:off x="609585" y="2683470"/>
+            <a:ext cx="507987" cy="508000"/>
+          </a:xfrm>
+          <a:prstGeom prst="ellipse">
+            <a:avLst/>
+          </a:prstGeom>
+          <a:solidFill>
+            <a:srgbClr val="F0609E"/>
+          </a:solidFill>
+          <a:ln/>
+        </p:spPr>
+      </p:sp>
+      <p:sp>
+        <p:nvSpPr>
+          <p:cNvPr id="6" name="Text 4"/>
+          <p:cNvSpPr/>
+          <p:nvPr/>
+        </p:nvSpPr>
+        <p:spPr>
+          <a:xfrm>
+            <a:off x="744916" y="2823170"/>
+            <a:ext cx="846910" cy="228600"/>
+          </a:xfrm>
+          <a:prstGeom prst="rect">
+            <a:avLst/>
+          </a:prstGeom>
+          <a:noFill/>
+          <a:ln/>
+        </p:spPr>
+        <p:txBody>
+          <a:bodyPr wrap="none" lIns="0" tIns="0" rIns="0" bIns="0" rtlCol="0" anchor="t"/>
+          <a:lstStyle/>
+          <a:p>
+            <a:pPr algn="l" indent="0" marL="0">
+              <a:lnSpc>
+                <a:spcPct val="83000"/>
+              </a:lnSpc>
+              <a:buNone/>
+            </a:pPr>
+            <a:r>
+              <a:rPr lang="en-US" sz="1800" b="1" dirty="0">
+                <a:solidFill>
+                  <a:srgbClr val="0E1F45"/>
+                </a:solidFill>
+                <a:latin typeface="Gantari Bold" pitchFamily="34" charset="0"/>
+                <a:ea typeface="Gantari Bold" pitchFamily="34" charset="-122"/>
+                <a:cs typeface="Gantari Bold" pitchFamily="34" charset="0"/>
+              </a:rPr>
+              <a:t>01</a:t>
+            </a:r>
+            <a:endParaRPr lang="en-US" sz="1800" dirty="0"/>
+          </a:p>
+        </p:txBody>
+      </p:sp>
+      <p:sp>
+        <p:nvSpPr>
+          <p:cNvPr id="7" name="Text 5"/>
+          <p:cNvSpPr/>
+          <p:nvPr/>
+        </p:nvSpPr>
+        <p:spPr>
+          <a:xfrm>
+            <a:off x="609585" y="3324126"/>
+            <a:ext cx="3454314" cy="330200"/>
+          </a:xfrm>
+          <a:prstGeom prst="rect">
+            <a:avLst/>
+          </a:prstGeom>
+          <a:noFill/>
+          <a:ln/>
+        </p:spPr>
+        <p:txBody>
+          <a:bodyPr wrap="none" lIns="0" tIns="0" rIns="0" bIns="0" rtlCol="0" anchor="t"/>
+          <a:lstStyle/>
+          <a:p>
+            <a:pPr algn="l" indent="0" marL="0">
+              <a:lnSpc>
+                <a:spcPct val="108000"/>
+              </a:lnSpc>
+              <a:buNone/>
+            </a:pPr>
+            <a:r>
+              <a:rPr lang="en-US" sz="2000" dirty="0">
+                <a:solidFill>
+                  <a:srgbClr val="F7F2E8"/>
+                </a:solidFill>
+                <a:latin typeface="Mozilla Text Medium" pitchFamily="34" charset="0"/>
+                <a:ea typeface="Mozilla Text Medium" pitchFamily="34" charset="-122"/>
+                <a:cs typeface="Mozilla Text Medium" pitchFamily="34" charset="0"/>
+              </a:rPr>
+              <a:t>Compare volume</a:t>
+            </a:r>
+            <a:endParaRPr lang="en-US" sz="2000" dirty="0"/>
+          </a:p>
+        </p:txBody>
+      </p:sp>
+      <p:sp>
+        <p:nvSpPr>
+          <p:cNvPr id="8" name="Text 6"/>
+          <p:cNvSpPr/>
+          <p:nvPr/>
+        </p:nvSpPr>
+        <p:spPr>
+          <a:xfrm>
+            <a:off x="609585" y="3806726"/>
+            <a:ext cx="3454314" cy="522883"/>
+          </a:xfrm>
+          <a:prstGeom prst="rect">
+            <a:avLst/>
+          </a:prstGeom>
+          <a:noFill/>
+          <a:ln/>
+        </p:spPr>
+        <p:txBody>
+          <a:bodyPr wrap="square" lIns="0" tIns="0" rIns="0" bIns="0" rtlCol="0" anchor="t">
+            <a:normAutofit/>
+          </a:bodyPr>
+          <a:lstStyle/>
+          <a:p>
+            <a:pPr algn="l" indent="0" marL="0">
+              <a:lnSpc>
+                <a:spcPct val="118000"/>
+              </a:lnSpc>
+              <a:buNone/>
+            </a:pPr>
+            <a:r>
+              <a:rPr lang="en-US" sz="1450" dirty="0">
+                <a:solidFill>
+                  <a:srgbClr val="F7F2E8"/>
+                </a:solidFill>
+                <a:latin typeface="Mozilla Text" pitchFamily="34" charset="0"/>
+                <a:ea typeface="Mozilla Text" pitchFamily="34" charset="-122"/>
+                <a:cs typeface="Mozilla Text" pitchFamily="34" charset="0"/>
+              </a:rPr>
+              <a:t>Quarterly test volume across 2025 and 2026.</a:t>
+            </a:r>
+            <a:endParaRPr lang="en-US" sz="1450" dirty="0"/>
+          </a:p>
+        </p:txBody>
+      </p:sp>
+      <p:sp>
+        <p:nvSpPr>
+          <p:cNvPr id="9" name="Shape 7"/>
+          <p:cNvSpPr/>
+          <p:nvPr/>
+        </p:nvSpPr>
+        <p:spPr>
+          <a:xfrm>
+            <a:off x="4368691" y="2683470"/>
+            <a:ext cx="507987" cy="508000"/>
+          </a:xfrm>
+          <a:prstGeom prst="ellipse">
+            <a:avLst/>
+          </a:prstGeom>
+          <a:solidFill>
+            <a:srgbClr val="F0609E"/>
+          </a:solidFill>
+          <a:ln/>
+        </p:spPr>
+      </p:sp>
+      <p:sp>
+        <p:nvSpPr>
+          <p:cNvPr id="10" name="Text 8"/>
+          <p:cNvSpPr/>
+          <p:nvPr/>
+        </p:nvSpPr>
+        <p:spPr>
+          <a:xfrm>
+            <a:off x="4490528" y="2823170"/>
+            <a:ext cx="873897" cy="228600"/>
+          </a:xfrm>
+          <a:prstGeom prst="rect">
+            <a:avLst/>
+          </a:prstGeom>
+          <a:noFill/>
+          <a:ln/>
+        </p:spPr>
+        <p:txBody>
+          <a:bodyPr wrap="none" lIns="0" tIns="0" rIns="0" bIns="0" rtlCol="0" anchor="t"/>
+          <a:lstStyle/>
+          <a:p>
+            <a:pPr algn="l" indent="0" marL="0">
+              <a:lnSpc>
+                <a:spcPct val="83000"/>
+              </a:lnSpc>
+              <a:buNone/>
+            </a:pPr>
+            <a:r>
+              <a:rPr lang="en-US" sz="1800" b="1" dirty="0">
+                <a:solidFill>
+                  <a:srgbClr val="0E1F45"/>
+                </a:solidFill>
+                <a:latin typeface="Gantari Bold" pitchFamily="34" charset="0"/>
+                <a:ea typeface="Gantari Bold" pitchFamily="34" charset="-122"/>
+                <a:cs typeface="Gantari Bold" pitchFamily="34" charset="0"/>
+              </a:rPr>
+              <a:t>02</a:t>
+            </a:r>
+            <a:endParaRPr lang="en-US" sz="1800" dirty="0"/>
+          </a:p>
+        </p:txBody>
+      </p:sp>
+      <p:sp>
+        <p:nvSpPr>
+          <p:cNvPr id="11" name="Text 9"/>
+          <p:cNvSpPr/>
+          <p:nvPr/>
+        </p:nvSpPr>
+        <p:spPr>
+          <a:xfrm>
+            <a:off x="4368691" y="3324126"/>
+            <a:ext cx="3454314" cy="330200"/>
+          </a:xfrm>
+          <a:prstGeom prst="rect">
+            <a:avLst/>
+          </a:prstGeom>
+          <a:noFill/>
+          <a:ln/>
+        </p:spPr>
+        <p:txBody>
+          <a:bodyPr wrap="none" lIns="0" tIns="0" rIns="0" bIns="0" rtlCol="0" anchor="t"/>
+          <a:lstStyle/>
+          <a:p>
+            <a:pPr algn="l" indent="0" marL="0">
+              <a:lnSpc>
+                <a:spcPct val="108000"/>
+              </a:lnSpc>
+              <a:buNone/>
+            </a:pPr>
+            <a:r>
+              <a:rPr lang="en-US" sz="2000" dirty="0">
+                <a:solidFill>
+                  <a:srgbClr val="F7F2E8"/>
+                </a:solidFill>
+                <a:latin typeface="Mozilla Text Medium" pitchFamily="34" charset="0"/>
+                <a:ea typeface="Mozilla Text Medium" pitchFamily="34" charset="-122"/>
+                <a:cs typeface="Mozilla Text Medium" pitchFamily="34" charset="0"/>
+              </a:rPr>
+              <a:t>Separate bookings</a:t>
+            </a:r>
+            <a:endParaRPr lang="en-US" sz="2000" dirty="0"/>
+          </a:p>
+        </p:txBody>
+      </p:sp>
+      <p:sp>
+        <p:nvSpPr>
+          <p:cNvPr id="12" name="Text 10"/>
+          <p:cNvSpPr/>
+          <p:nvPr/>
+        </p:nvSpPr>
+        <p:spPr>
+          <a:xfrm>
+            <a:off x="4368691" y="3806726"/>
+            <a:ext cx="3454314" cy="522883"/>
+          </a:xfrm>
+          <a:prstGeom prst="rect">
+            <a:avLst/>
+          </a:prstGeom>
+          <a:noFill/>
+          <a:ln/>
+        </p:spPr>
+        <p:txBody>
+          <a:bodyPr wrap="square" lIns="0" tIns="0" rIns="0" bIns="0" rtlCol="0" anchor="t">
+            <a:normAutofit/>
+          </a:bodyPr>
+          <a:lstStyle/>
+          <a:p>
+            <a:pPr algn="l" indent="0" marL="0">
+              <a:lnSpc>
+                <a:spcPct val="118000"/>
+              </a:lnSpc>
+              <a:buNone/>
+            </a:pPr>
+            <a:r>
+              <a:rPr lang="en-US" sz="1450" dirty="0">
+                <a:solidFill>
+                  <a:srgbClr val="F7F2E8"/>
+                </a:solidFill>
+                <a:latin typeface="Mozilla Text" pitchFamily="34" charset="0"/>
+                <a:ea typeface="Mozilla Text" pitchFamily="34" charset="-122"/>
+                <a:cs typeface="Mozilla Text" pitchFamily="34" charset="0"/>
+              </a:rPr>
+              <a:t>Unique bookings, including campaign-waiver bookings.</a:t>
+            </a:r>
+            <a:endParaRPr lang="en-US" sz="1450" dirty="0"/>
+          </a:p>
+        </p:txBody>
+      </p:sp>
+      <p:sp>
+        <p:nvSpPr>
+          <p:cNvPr id="13" name="Shape 11"/>
+          <p:cNvSpPr/>
+          <p:nvPr/>
+        </p:nvSpPr>
+        <p:spPr>
+          <a:xfrm>
+            <a:off x="8127797" y="2683470"/>
+            <a:ext cx="507987" cy="508000"/>
+          </a:xfrm>
+          <a:prstGeom prst="ellipse">
+            <a:avLst/>
+          </a:prstGeom>
+          <a:solidFill>
+            <a:srgbClr val="FF8A3D"/>
+          </a:solidFill>
+          <a:ln/>
+        </p:spPr>
+      </p:sp>
+      <p:sp>
+        <p:nvSpPr>
+          <p:cNvPr id="14" name="Text 12"/>
+          <p:cNvSpPr/>
+          <p:nvPr/>
+        </p:nvSpPr>
+        <p:spPr>
+          <a:xfrm>
+            <a:off x="8249634" y="2823170"/>
+            <a:ext cx="873897" cy="228600"/>
+          </a:xfrm>
+          <a:prstGeom prst="rect">
+            <a:avLst/>
+          </a:prstGeom>
+          <a:noFill/>
+          <a:ln/>
+        </p:spPr>
+        <p:txBody>
+          <a:bodyPr wrap="none" lIns="0" tIns="0" rIns="0" bIns="0" rtlCol="0" anchor="t"/>
+          <a:lstStyle/>
+          <a:p>
+            <a:pPr algn="l" indent="0" marL="0">
+              <a:lnSpc>
+                <a:spcPct val="83000"/>
+              </a:lnSpc>
+              <a:buNone/>
+            </a:pPr>
+            <a:r>
+              <a:rPr lang="en-US" sz="1800" b="1" dirty="0">
+                <a:solidFill>
+                  <a:srgbClr val="0E1F45"/>
+                </a:solidFill>
+                <a:latin typeface="Gantari Bold" pitchFamily="34" charset="0"/>
+                <a:ea typeface="Gantari Bold" pitchFamily="34" charset="-122"/>
+                <a:cs typeface="Gantari Bold" pitchFamily="34" charset="0"/>
+              </a:rPr>
+              <a:t>03</a:t>
+            </a:r>
+            <a:endParaRPr lang="en-US" sz="1800" dirty="0"/>
+          </a:p>
+        </p:txBody>
+      </p:sp>
+      <p:sp>
+        <p:nvSpPr>
+          <p:cNvPr id="15" name="Text 13"/>
+          <p:cNvSpPr/>
+          <p:nvPr/>
+        </p:nvSpPr>
+        <p:spPr>
+          <a:xfrm>
+            <a:off x="8127797" y="3324126"/>
+            <a:ext cx="3454314" cy="330200"/>
+          </a:xfrm>
+          <a:prstGeom prst="rect">
+            <a:avLst/>
+          </a:prstGeom>
+          <a:noFill/>
+          <a:ln/>
+        </p:spPr>
+        <p:txBody>
+          <a:bodyPr wrap="none" lIns="0" tIns="0" rIns="0" bIns="0" rtlCol="0" anchor="t"/>
+          <a:lstStyle/>
+          <a:p>
+            <a:pPr algn="l" indent="0" marL="0">
+              <a:lnSpc>
+                <a:spcPct val="108000"/>
+              </a:lnSpc>
+              <a:buNone/>
+            </a:pPr>
+            <a:r>
+              <a:rPr lang="en-US" sz="2000" dirty="0">
+                <a:solidFill>
+                  <a:srgbClr val="F7F2E8"/>
+                </a:solidFill>
+                <a:latin typeface="Mozilla Text Medium" pitchFamily="34" charset="0"/>
+                <a:ea typeface="Mozilla Text Medium" pitchFamily="34" charset="-122"/>
+                <a:cs typeface="Mozilla Text Medium" pitchFamily="34" charset="0"/>
+              </a:rPr>
+              <a:t>Link outcomes</a:t>
+            </a:r>
+            <a:endParaRPr lang="en-US" sz="2000" dirty="0"/>
+          </a:p>
+        </p:txBody>
+      </p:sp>
+      <p:sp>
+        <p:nvSpPr>
+          <p:cNvPr id="16" name="Text 14"/>
+          <p:cNvSpPr/>
+          <p:nvPr/>
+        </p:nvSpPr>
+        <p:spPr>
+          <a:xfrm>
+            <a:off x="8127797" y="3806726"/>
+            <a:ext cx="3454314" cy="522883"/>
+          </a:xfrm>
+          <a:prstGeom prst="rect">
+            <a:avLst/>
+          </a:prstGeom>
+          <a:noFill/>
+          <a:ln/>
+        </p:spPr>
+        <p:txBody>
+          <a:bodyPr wrap="square" lIns="0" tIns="0" rIns="0" bIns="0" rtlCol="0" anchor="t">
+            <a:normAutofit/>
+          </a:bodyPr>
+          <a:lstStyle/>
+          <a:p>
+            <a:pPr algn="l" indent="0" marL="0">
+              <a:lnSpc>
+                <a:spcPct val="118000"/>
+              </a:lnSpc>
+              <a:buNone/>
+            </a:pPr>
+            <a:r>
+              <a:rPr lang="en-US" sz="1450" dirty="0">
+                <a:solidFill>
+                  <a:srgbClr val="F7F2E8"/>
+                </a:solidFill>
+                <a:latin typeface="Mozilla Text" pitchFamily="34" charset="0"/>
+                <a:ea typeface="Mozilla Text" pitchFamily="34" charset="-122"/>
+                <a:cs typeface="Mozilla Text" pitchFamily="34" charset="0"/>
+              </a:rPr>
+              <a:t>New-patient campaign activity, tests, and revenue.</a:t>
+            </a:r>
+            <a:endParaRPr lang="en-US" sz="1450" dirty="0"/>
+          </a:p>
+        </p:txBody>
+      </p:sp>
+      <p:sp>
+        <p:nvSpPr>
+          <p:cNvPr id="17" name="Text 15"/>
+          <p:cNvSpPr/>
+          <p:nvPr/>
+        </p:nvSpPr>
+        <p:spPr>
+          <a:xfrm>
+            <a:off x="609585" y="4523284"/>
+            <a:ext cx="11582110" cy="248543"/>
+          </a:xfrm>
+          <a:prstGeom prst="rect">
+            <a:avLst/>
+          </a:prstGeom>
+          <a:noFill/>
+          <a:ln/>
+        </p:spPr>
+        <p:txBody>
+          <a:bodyPr wrap="none" lIns="0" tIns="0" rIns="0" bIns="0" rtlCol="0" anchor="t"/>
+          <a:lstStyle/>
+          <a:p>
+            <a:pPr algn="l" indent="0" marL="0">
+              <a:lnSpc>
+                <a:spcPct val="113000"/>
+              </a:lnSpc>
+              <a:buNone/>
+            </a:pPr>
+            <a:r>
+              <a:rPr lang="en-US" sz="1450" spc="7" kern="100" dirty="0">
+                <a:solidFill>
+                  <a:srgbClr val="C2C8D8"/>
+                </a:solidFill>
+                <a:latin typeface="Mozilla Text" pitchFamily="34" charset="0"/>
+                <a:ea typeface="Mozilla Text" pitchFamily="34" charset="-122"/>
+                <a:cs typeface="Mozilla Text" pitchFamily="34" charset="0"/>
+              </a:rPr>
+              <a:t>Preparation steps are reconstructed at a high level because the original Python code was not supplied.</a:t>
+            </a:r>
+            <a:endParaRPr lang="en-US" sz="1450" dirty="0"/>
+          </a:p>
+        </p:txBody>
+      </p:sp>
+    </p:spTree>
+  </p:cSld>
+  <p:clrMapOvr>
+    <a:masterClrMapping/>
+  </p:clrMapOvr>
+</p:sld>
+</file>
+
+<file path=ppt/slides/slide3.xml><?xml version="1.0" encoding="utf-8"?>
+<p:sld xmlns:a="http://schemas.openxmlformats.org/drawingml/2006/main" xmlns:r="http://schemas.openxmlformats.org/officeDocument/2006/relationships" xmlns:p="http://schemas.openxmlformats.org/presentationml/2006/main">
+  <p:cSld name="Slide 3">
+    <p:spTree>
+      <p:nvGrpSpPr>
+        <p:cNvPr id="1" name=""/>
+        <p:cNvGrpSpPr/>
+        <p:nvPr/>
+      </p:nvGrpSpPr>
+      <p:grpSpPr>
+        <a:xfrm>
+          <a:off x="0" y="0"/>
+          <a:ext cx="0" cy="0"/>
+          <a:chOff x="0" y="0"/>
+          <a:chExt cx="0" cy="0"/>
+        </a:xfrm>
+      </p:grpSpPr>
+      <p:sp>
+        <p:nvSpPr>
+          <p:cNvPr id="2" name="Text 0"/>
+          <p:cNvSpPr/>
+          <p:nvPr/>
+        </p:nvSpPr>
+        <p:spPr>
+          <a:xfrm>
+            <a:off x="609585" y="616268"/>
+            <a:ext cx="11582110" cy="220960"/>
+          </a:xfrm>
+          <a:prstGeom prst="rect">
+            <a:avLst/>
+          </a:prstGeom>
+          <a:noFill/>
+          <a:ln/>
+        </p:spPr>
+        <p:txBody>
+          <a:bodyPr wrap="none" lIns="0" tIns="0" rIns="0" bIns="0" rtlCol="0" anchor="t"/>
+          <a:lstStyle/>
+          <a:p>
+            <a:pPr algn="l" indent="0" marL="0">
+              <a:lnSpc>
+                <a:spcPct val="100000"/>
+              </a:lnSpc>
+              <a:buNone/>
+            </a:pPr>
+            <a:r>
+              <a:rPr lang="en-US" sz="1450" spc="29" kern="100" dirty="0">
+                <a:solidFill>
+                  <a:srgbClr val="F0609E"/>
+                </a:solidFill>
+                <a:latin typeface="Mozilla Text SemiBold" pitchFamily="34" charset="0"/>
+                <a:ea typeface="Mozilla Text SemiBold" pitchFamily="34" charset="-122"/>
+                <a:cs typeface="Mozilla Text SemiBold" pitchFamily="34" charset="0"/>
+              </a:rPr>
+              <a:t>VOLUME SIGNAL</a:t>
+            </a:r>
+            <a:endParaRPr lang="en-US" sz="1450" dirty="0"/>
+          </a:p>
+        </p:txBody>
+      </p:sp>
+      <p:sp>
+        <p:nvSpPr>
+          <p:cNvPr id="3" name="Text 1"/>
+          <p:cNvSpPr/>
+          <p:nvPr/>
+        </p:nvSpPr>
+        <p:spPr>
+          <a:xfrm>
+            <a:off x="609585" y="944834"/>
+            <a:ext cx="10972526" cy="493713"/>
+          </a:xfrm>
+          <a:prstGeom prst="rect">
+            <a:avLst/>
+          </a:prstGeom>
+          <a:noFill/>
+          <a:ln/>
+        </p:spPr>
+        <p:txBody>
+          <a:bodyPr wrap="none" lIns="0" tIns="0" rIns="0" bIns="0" rtlCol="0" anchor="t"/>
+          <a:lstStyle/>
+          <a:p>
+            <a:pPr algn="l" indent="0" marL="0">
+              <a:lnSpc>
+                <a:spcPct val="90000"/>
+              </a:lnSpc>
+              <a:buNone/>
+            </a:pPr>
+            <a:r>
+              <a:rPr lang="en-US" sz="3600" b="1" spc="-18" kern="100" dirty="0">
+                <a:solidFill>
+                  <a:srgbClr val="F7F2E8"/>
+                </a:solidFill>
+                <a:latin typeface="Gantari Bold" pitchFamily="34" charset="0"/>
+                <a:ea typeface="Gantari Bold" pitchFamily="34" charset="-122"/>
+                <a:cs typeface="Gantari Bold" pitchFamily="34" charset="0"/>
+              </a:rPr>
+              <a:t>Q1 test volume increased 10.26% year over year</a:t>
+            </a:r>
+            <a:endParaRPr lang="en-US" sz="3600" dirty="0"/>
+          </a:p>
+        </p:txBody>
+      </p:sp>
+      <p:sp>
+        <p:nvSpPr>
+          <p:cNvPr id="4" name="Text 2"/>
+          <p:cNvSpPr/>
+          <p:nvPr/>
+        </p:nvSpPr>
+        <p:spPr>
+          <a:xfrm>
+            <a:off x="609585" y="2505750"/>
+            <a:ext cx="2804149" cy="940991"/>
+          </a:xfrm>
+          <a:prstGeom prst="rect">
+            <a:avLst/>
+          </a:prstGeom>
+          <a:noFill/>
+          <a:ln/>
+        </p:spPr>
+        <p:txBody>
+          <a:bodyPr wrap="none" lIns="0" tIns="0" rIns="0" bIns="0" rtlCol="0" anchor="t"/>
+          <a:lstStyle/>
+          <a:p>
+            <a:pPr algn="l" indent="0" marL="0">
+              <a:lnSpc>
+                <a:spcPct val="79000"/>
+              </a:lnSpc>
+              <a:buNone/>
+            </a:pPr>
+            <a:r>
+              <a:rPr lang="en-US" sz="7800" b="1" spc="-156" kern="100" dirty="0">
+                <a:solidFill>
+                  <a:srgbClr val="F0609E"/>
+                </a:solidFill>
+                <a:latin typeface="Gantari Bold" pitchFamily="34" charset="0"/>
+                <a:ea typeface="Gantari Bold" pitchFamily="34" charset="-122"/>
+                <a:cs typeface="Gantari Bold" pitchFamily="34" charset="0"/>
+              </a:rPr>
+              <a:t>+3,149</a:t>
+            </a:r>
+            <a:endParaRPr lang="en-US" sz="7800" dirty="0"/>
+          </a:p>
+        </p:txBody>
+      </p:sp>
+      <p:sp>
+        <p:nvSpPr>
+          <p:cNvPr id="5" name="Text 3"/>
+          <p:cNvSpPr/>
+          <p:nvPr/>
+        </p:nvSpPr>
+        <p:spPr>
+          <a:xfrm>
+            <a:off x="609585" y="3631505"/>
+            <a:ext cx="2804149" cy="360660"/>
+          </a:xfrm>
+          <a:prstGeom prst="rect">
+            <a:avLst/>
+          </a:prstGeom>
+          <a:noFill/>
+          <a:ln/>
+        </p:spPr>
+        <p:txBody>
+          <a:bodyPr wrap="none" lIns="0" tIns="0" rIns="0" bIns="0" rtlCol="0" anchor="t"/>
+          <a:lstStyle/>
+          <a:p>
+            <a:pPr algn="l" indent="0" marL="0">
+              <a:lnSpc>
+                <a:spcPct val="118000"/>
+              </a:lnSpc>
+              <a:buNone/>
+            </a:pPr>
+            <a:r>
+              <a:rPr lang="en-US" sz="2000" dirty="0">
+                <a:solidFill>
+                  <a:srgbClr val="F7F2E8"/>
+                </a:solidFill>
+                <a:latin typeface="Mozilla Text" pitchFamily="34" charset="0"/>
+                <a:ea typeface="Mozilla Text" pitchFamily="34" charset="-122"/>
+                <a:cs typeface="Mozilla Text" pitchFamily="34" charset="0"/>
+              </a:rPr>
+              <a:t>tests in Q1</a:t>
+            </a:r>
+            <a:endParaRPr lang="en-US" sz="2000" dirty="0"/>
+          </a:p>
+        </p:txBody>
+      </p:sp>
+      <p:sp>
+        <p:nvSpPr>
+          <p:cNvPr id="6" name="Text 4"/>
+          <p:cNvSpPr/>
+          <p:nvPr/>
+        </p:nvSpPr>
+        <p:spPr>
+          <a:xfrm>
+            <a:off x="609585" y="4119166"/>
+            <a:ext cx="2804149" cy="919460"/>
+          </a:xfrm>
+          <a:prstGeom prst="rect">
+            <a:avLst/>
+          </a:prstGeom>
+          <a:noFill/>
+          <a:ln/>
+        </p:spPr>
+        <p:txBody>
+          <a:bodyPr wrap="square" lIns="0" tIns="0" rIns="0" bIns="0" rtlCol="0" anchor="t">
+            <a:normAutofit/>
+          </a:bodyPr>
+          <a:lstStyle/>
+          <a:p>
+            <a:pPr algn="l" indent="0" marL="0">
+              <a:lnSpc>
+                <a:spcPct val="118000"/>
+              </a:lnSpc>
+              <a:buNone/>
+            </a:pPr>
+            <a:r>
+              <a:rPr lang="en-US" sz="1700" dirty="0">
+                <a:solidFill>
+                  <a:srgbClr val="C2C8D8"/>
+                </a:solidFill>
+                <a:latin typeface="Mozilla Text" pitchFamily="34" charset="0"/>
+                <a:ea typeface="Mozilla Text" pitchFamily="34" charset="-122"/>
+                <a:cs typeface="Mozilla Text" pitchFamily="34" charset="0"/>
+              </a:rPr>
+              <a:t>A stronger demand signal, with no causal driver established.</a:t>
+            </a:r>
+            <a:endParaRPr lang="en-US" sz="1700" dirty="0"/>
+          </a:p>
+        </p:txBody>
+      </p:sp>
+      <p:pic>
+        <p:nvPicPr>
+          <p:cNvPr id="7" name="Image 0" descr="preencoded.png">    </p:cNvPr>
+          <p:cNvPicPr>
+            <a:picLocks noChangeAspect="1"/>
+          </p:cNvPicPr>
+          <p:nvPr/>
+        </p:nvPicPr>
+        <p:blipFill>
+          <a:blip r:embed="rId1"/>
+          <a:stretch>
+            <a:fillRect/>
+          </a:stretch>
+        </p:blipFill>
+        <p:spPr>
+          <a:xfrm>
+            <a:off x="3870823" y="2128540"/>
+            <a:ext cx="7619809" cy="3175000"/>
+          </a:xfrm>
+          <a:prstGeom prst="rect">
+            <a:avLst/>
+          </a:prstGeom>
+        </p:spPr>
+      </p:pic>
+      <p:sp>
+        <p:nvSpPr>
+          <p:cNvPr id="8" name="Text 5"/>
+          <p:cNvSpPr/>
+          <p:nvPr/>
+        </p:nvSpPr>
+        <p:spPr>
+          <a:xfrm>
+            <a:off x="609585" y="5999857"/>
+            <a:ext cx="11582110" cy="248543"/>
+          </a:xfrm>
+          <a:prstGeom prst="rect">
+            <a:avLst/>
+          </a:prstGeom>
+          <a:noFill/>
+          <a:ln/>
+        </p:spPr>
+        <p:txBody>
+          <a:bodyPr wrap="none" lIns="0" tIns="0" rIns="0" bIns="0" rtlCol="0" anchor="t"/>
+          <a:lstStyle/>
+          <a:p>
+            <a:pPr algn="l" indent="0" marL="0">
+              <a:lnSpc>
+                <a:spcPct val="113000"/>
+              </a:lnSpc>
+              <a:buNone/>
+            </a:pPr>
+            <a:r>
+              <a:rPr lang="en-US" sz="1450" spc="7" kern="100" dirty="0">
+                <a:solidFill>
+                  <a:srgbClr val="C2C8D8"/>
+                </a:solidFill>
+                <a:latin typeface="Mozilla Text" pitchFamily="34" charset="0"/>
+                <a:ea typeface="Mozilla Text" pitchFamily="34" charset="-122"/>
+                <a:cs typeface="Mozilla Text" pitchFamily="34" charset="0"/>
+              </a:rPr>
+              <a:t>Q1 2025 versus Q1 2026 test volume</a:t>
+            </a:r>
+            <a:endParaRPr lang="en-US" sz="1450" dirty="0"/>
+          </a:p>
+        </p:txBody>
+      </p:sp>
+    </p:spTree>
+  </p:cSld>
+  <p:clrMapOvr>
+    <a:masterClrMapping/>
+  </p:clrMapOvr>
+</p:sld>
+</file>
+
+<file path=ppt/slides/slide4.xml><?xml version="1.0" encoding="utf-8"?>
+<p:sld xmlns:a="http://schemas.openxmlformats.org/drawingml/2006/main" xmlns:r="http://schemas.openxmlformats.org/officeDocument/2006/relationships" xmlns:p="http://schemas.openxmlformats.org/presentationml/2006/main">
+  <p:cSld name="Slide 4">
+    <p:spTree>
+      <p:nvGrpSpPr>
+        <p:cNvPr id="1" name=""/>
+        <p:cNvGrpSpPr/>
+        <p:nvPr/>
+      </p:nvGrpSpPr>
+      <p:grpSpPr>
+        <a:xfrm>
+          <a:off x="0" y="0"/>
+          <a:ext cx="0" cy="0"/>
+          <a:chOff x="0" y="0"/>
+          <a:chExt cx="0" cy="0"/>
+        </a:xfrm>
+      </p:grpSpPr>
+      <p:sp>
+        <p:nvSpPr>
+          <p:cNvPr id="2" name="Text 0"/>
+          <p:cNvSpPr/>
+          <p:nvPr/>
+        </p:nvSpPr>
+        <p:spPr>
+          <a:xfrm>
+            <a:off x="609585" y="616268"/>
+            <a:ext cx="11582110" cy="220960"/>
+          </a:xfrm>
+          <a:prstGeom prst="rect">
+            <a:avLst/>
+          </a:prstGeom>
+          <a:noFill/>
+          <a:ln/>
+        </p:spPr>
+        <p:txBody>
+          <a:bodyPr wrap="none" lIns="0" tIns="0" rIns="0" bIns="0" rtlCol="0" anchor="t"/>
+          <a:lstStyle/>
+          <a:p>
+            <a:pPr algn="l" indent="0" marL="0">
+              <a:lnSpc>
+                <a:spcPct val="100000"/>
+              </a:lnSpc>
+              <a:buNone/>
+            </a:pPr>
+            <a:r>
+              <a:rPr lang="en-US" sz="1450" spc="29" kern="100" dirty="0">
+                <a:solidFill>
+                  <a:srgbClr val="F0609E"/>
+                </a:solidFill>
+                <a:latin typeface="Mozilla Text SemiBold" pitchFamily="34" charset="0"/>
+                <a:ea typeface="Mozilla Text SemiBold" pitchFamily="34" charset="-122"/>
+                <a:cs typeface="Mozilla Text SemiBold" pitchFamily="34" charset="0"/>
+              </a:rPr>
+              <a:t>CAMPAIGN MIX</a:t>
+            </a:r>
+            <a:endParaRPr lang="en-US" sz="1450" dirty="0"/>
+          </a:p>
+        </p:txBody>
+      </p:sp>
+      <p:sp>
+        <p:nvSpPr>
+          <p:cNvPr id="3" name="Text 1"/>
+          <p:cNvSpPr/>
+          <p:nvPr/>
+        </p:nvSpPr>
+        <p:spPr>
+          <a:xfrm>
+            <a:off x="609585" y="944834"/>
+            <a:ext cx="10972526" cy="987425"/>
+          </a:xfrm>
+          <a:prstGeom prst="rect">
+            <a:avLst/>
+          </a:prstGeom>
+          <a:noFill/>
+          <a:ln/>
+        </p:spPr>
+        <p:txBody>
+          <a:bodyPr wrap="square" lIns="0" tIns="0" rIns="0" bIns="0" rtlCol="0" anchor="t">
+            <a:normAutofit/>
+          </a:bodyPr>
+          <a:lstStyle/>
+          <a:p>
+            <a:pPr algn="l" indent="0" marL="0">
+              <a:lnSpc>
+                <a:spcPct val="90000"/>
+              </a:lnSpc>
+              <a:buNone/>
+            </a:pPr>
+            <a:r>
+              <a:rPr lang="en-US" sz="3600" b="1" spc="-18" kern="100" dirty="0">
+                <a:solidFill>
+                  <a:srgbClr val="F7F2E8"/>
+                </a:solidFill>
+                <a:latin typeface="Gantari Bold" pitchFamily="34" charset="0"/>
+                <a:ea typeface="Gantari Bold" pitchFamily="34" charset="-122"/>
+                <a:cs typeface="Gantari Bold" pitchFamily="34" charset="0"/>
+              </a:rPr>
+              <a:t>Campaign-waiver bookings touched nearly half of Q1 tests</a:t>
+            </a:r>
+            <a:endParaRPr lang="en-US" sz="3600" dirty="0"/>
+          </a:p>
+        </p:txBody>
+      </p:sp>
+      <p:sp>
+        <p:nvSpPr>
+          <p:cNvPr id="4" name="Text 2"/>
+          <p:cNvSpPr/>
+          <p:nvPr/>
+        </p:nvSpPr>
+        <p:spPr>
+          <a:xfrm>
+            <a:off x="609585" y="2689106"/>
+            <a:ext cx="4206075" cy="940991"/>
+          </a:xfrm>
+          <a:prstGeom prst="rect">
+            <a:avLst/>
+          </a:prstGeom>
+          <a:noFill/>
+          <a:ln/>
+        </p:spPr>
+        <p:txBody>
+          <a:bodyPr wrap="none" lIns="0" tIns="0" rIns="0" bIns="0" rtlCol="0" anchor="t"/>
+          <a:lstStyle/>
+          <a:p>
+            <a:pPr algn="l" indent="0" marL="0">
+              <a:lnSpc>
+                <a:spcPct val="79000"/>
+              </a:lnSpc>
+              <a:buNone/>
+            </a:pPr>
+            <a:r>
+              <a:rPr lang="en-US" sz="7800" b="1" spc="-156" kern="100" dirty="0">
+                <a:solidFill>
+                  <a:srgbClr val="F0609E"/>
+                </a:solidFill>
+                <a:latin typeface="Gantari Bold" pitchFamily="34" charset="0"/>
+                <a:ea typeface="Gantari Bold" pitchFamily="34" charset="-122"/>
+                <a:cs typeface="Gantari Bold" pitchFamily="34" charset="0"/>
+              </a:rPr>
+              <a:t>46.63%</a:t>
+            </a:r>
+            <a:endParaRPr lang="en-US" sz="7800" dirty="0"/>
+          </a:p>
+        </p:txBody>
+      </p:sp>
+      <p:sp>
+        <p:nvSpPr>
+          <p:cNvPr id="5" name="Text 3"/>
+          <p:cNvSpPr/>
+          <p:nvPr/>
+        </p:nvSpPr>
+        <p:spPr>
+          <a:xfrm>
+            <a:off x="609585" y="3814862"/>
+            <a:ext cx="4206075" cy="360660"/>
+          </a:xfrm>
+          <a:prstGeom prst="rect">
+            <a:avLst/>
+          </a:prstGeom>
+          <a:noFill/>
+          <a:ln/>
+        </p:spPr>
+        <p:txBody>
+          <a:bodyPr wrap="none" lIns="0" tIns="0" rIns="0" bIns="0" rtlCol="0" anchor="t"/>
+          <a:lstStyle/>
+          <a:p>
+            <a:pPr algn="l" indent="0" marL="0">
+              <a:lnSpc>
+                <a:spcPct val="118000"/>
+              </a:lnSpc>
+              <a:buNone/>
+            </a:pPr>
+            <a:r>
+              <a:rPr lang="en-US" sz="2000" dirty="0">
+                <a:solidFill>
+                  <a:srgbClr val="F7F2E8"/>
+                </a:solidFill>
+                <a:latin typeface="Mozilla Text" pitchFamily="34" charset="0"/>
+                <a:ea typeface="Mozilla Text" pitchFamily="34" charset="-122"/>
+                <a:cs typeface="Mozilla Text" pitchFamily="34" charset="0"/>
+              </a:rPr>
+              <a:t>of Q1 2026 tests</a:t>
+            </a:r>
+            <a:endParaRPr lang="en-US" sz="2000" dirty="0"/>
+          </a:p>
+        </p:txBody>
+      </p:sp>
+      <p:sp>
+        <p:nvSpPr>
+          <p:cNvPr id="6" name="Text 4"/>
+          <p:cNvSpPr/>
+          <p:nvPr/>
+        </p:nvSpPr>
+        <p:spPr>
+          <a:xfrm>
+            <a:off x="609585" y="4302522"/>
+            <a:ext cx="4206075" cy="1046460"/>
+          </a:xfrm>
+          <a:prstGeom prst="rect">
+            <a:avLst/>
+          </a:prstGeom>
+          <a:noFill/>
+          <a:ln/>
+        </p:spPr>
+        <p:txBody>
+          <a:bodyPr wrap="square" lIns="0" tIns="0" rIns="0" bIns="0" rtlCol="0" anchor="t">
+            <a:normAutofit/>
+          </a:bodyPr>
+          <a:lstStyle/>
+          <a:p>
+            <a:pPr algn="l" indent="0" marL="0">
+              <a:lnSpc>
+                <a:spcPct val="118000"/>
+              </a:lnSpc>
+              <a:spcAft>
+                <a:spcPts val="950"/>
+              </a:spcAft>
+              <a:buNone/>
+            </a:pPr>
+            <a:r>
+              <a:rPr lang="en-US" sz="1700" b="1" dirty="0">
+                <a:solidFill>
+                  <a:srgbClr val="F7F2E8"/>
+                </a:solidFill>
+                <a:latin typeface="Mozilla Text Bold" pitchFamily="34" charset="0"/>
+                <a:ea typeface="Mozilla Text Bold" pitchFamily="34" charset="-122"/>
+                <a:cs typeface="Mozilla Text Bold" pitchFamily="34" charset="0"/>
+              </a:rPr>
+              <a:t>15,784</a:t>
+            </a:r>
+            <a:pPr algn="l" indent="0" marL="0">
+              <a:lnSpc>
+                <a:spcPct val="118000"/>
+              </a:lnSpc>
+              <a:spcAft>
+                <a:spcPts val="950"/>
+              </a:spcAft>
+              <a:buNone/>
+            </a:pPr>
+            <a:r>
+              <a:rPr lang="en-US" sz="1700" dirty="0">
+                <a:solidFill>
+                  <a:srgbClr val="F7F2E8"/>
+                </a:solidFill>
+                <a:latin typeface="Mozilla Text" pitchFamily="34" charset="0"/>
+                <a:ea typeface="Mozilla Text" pitchFamily="34" charset="-122"/>
+                <a:cs typeface="Mozilla Text" pitchFamily="34" charset="0"/>
+              </a:rPr>
+              <a:t> campaign-waiver bookings across </a:t>
+            </a:r>
+            <a:pPr algn="l" indent="0" marL="0">
+              <a:lnSpc>
+                <a:spcPct val="118000"/>
+              </a:lnSpc>
+              <a:spcAft>
+                <a:spcPts val="950"/>
+              </a:spcAft>
+              <a:buNone/>
+            </a:pPr>
+            <a:r>
+              <a:rPr lang="en-US" sz="1700" b="1" dirty="0">
+                <a:solidFill>
+                  <a:srgbClr val="F7F2E8"/>
+                </a:solidFill>
+                <a:latin typeface="Mozilla Text Bold" pitchFamily="34" charset="0"/>
+                <a:ea typeface="Mozilla Text Bold" pitchFamily="34" charset="-122"/>
+                <a:cs typeface="Mozilla Text Bold" pitchFamily="34" charset="0"/>
+              </a:rPr>
+              <a:t>33,849</a:t>
+            </a:r>
+            <a:pPr algn="l" indent="0" marL="0">
+              <a:lnSpc>
+                <a:spcPct val="118000"/>
+              </a:lnSpc>
+              <a:spcAft>
+                <a:spcPts val="950"/>
+              </a:spcAft>
+              <a:buNone/>
+            </a:pPr>
+            <a:r>
+              <a:rPr lang="en-US" sz="1700" dirty="0">
+                <a:solidFill>
+                  <a:srgbClr val="F7F2E8"/>
+                </a:solidFill>
+                <a:latin typeface="Mozilla Text" pitchFamily="34" charset="0"/>
+                <a:ea typeface="Mozilla Text" pitchFamily="34" charset="-122"/>
+                <a:cs typeface="Mozilla Text" pitchFamily="34" charset="0"/>
+              </a:rPr>
+              <a:t> tests.</a:t>
+            </a:r>
+            <a:endParaRPr lang="en-US" sz="1700" dirty="0"/>
+          </a:p>
+          <a:p>
+            <a:pPr algn="l" indent="0" marL="0">
+              <a:lnSpc>
+                <a:spcPct val="118000"/>
+              </a:lnSpc>
+              <a:buNone/>
+            </a:pPr>
+            <a:r>
+              <a:rPr lang="en-US" sz="1700" b="1" dirty="0">
+                <a:solidFill>
+                  <a:srgbClr val="F7F2E8"/>
+                </a:solidFill>
+                <a:latin typeface="Mozilla Text Bold" pitchFamily="34" charset="0"/>
+                <a:ea typeface="Mozilla Text Bold" pitchFamily="34" charset="-122"/>
+                <a:cs typeface="Mozilla Text Bold" pitchFamily="34" charset="0"/>
+              </a:rPr>
+              <a:t>18,065</a:t>
+            </a:r>
+            <a:pPr algn="l" indent="0" marL="0">
+              <a:lnSpc>
+                <a:spcPct val="118000"/>
+              </a:lnSpc>
+              <a:buNone/>
+            </a:pPr>
+            <a:r>
+              <a:rPr lang="en-US" sz="1700" dirty="0">
+                <a:solidFill>
+                  <a:srgbClr val="F7F2E8"/>
+                </a:solidFill>
+                <a:latin typeface="Mozilla Text" pitchFamily="34" charset="0"/>
+                <a:ea typeface="Mozilla Text" pitchFamily="34" charset="-122"/>
+                <a:cs typeface="Mozilla Text" pitchFamily="34" charset="0"/>
+              </a:rPr>
+              <a:t> other bookings.</a:t>
+            </a:r>
+            <a:endParaRPr lang="en-US" sz="1700" dirty="0"/>
+          </a:p>
+        </p:txBody>
+      </p:sp>
+      <p:pic>
+        <p:nvPicPr>
+          <p:cNvPr id="7" name="Image 0" descr="preencoded.png">    </p:cNvPr>
+          <p:cNvPicPr>
+            <a:picLocks noChangeAspect="1"/>
+          </p:cNvPicPr>
+          <p:nvPr/>
+        </p:nvPicPr>
+        <p:blipFill>
+          <a:blip r:embed="rId1"/>
+          <a:stretch>
+            <a:fillRect/>
+          </a:stretch>
+        </p:blipFill>
+        <p:spPr>
+          <a:xfrm>
+            <a:off x="5272749" y="2692896"/>
+            <a:ext cx="5333867" cy="2540000"/>
+          </a:xfrm>
+          <a:prstGeom prst="rect">
+            <a:avLst/>
+          </a:prstGeom>
+        </p:spPr>
+      </p:pic>
+      <p:sp>
+        <p:nvSpPr>
+          <p:cNvPr id="8" name="Text 5"/>
+          <p:cNvSpPr/>
+          <p:nvPr/>
+        </p:nvSpPr>
+        <p:spPr>
+          <a:xfrm>
+            <a:off x="609585" y="5999857"/>
+            <a:ext cx="11582110" cy="248543"/>
+          </a:xfrm>
+          <a:prstGeom prst="rect">
+            <a:avLst/>
+          </a:prstGeom>
+          <a:noFill/>
+          <a:ln/>
+        </p:spPr>
+        <p:txBody>
+          <a:bodyPr wrap="none" lIns="0" tIns="0" rIns="0" bIns="0" rtlCol="0" anchor="t"/>
+          <a:lstStyle/>
+          <a:p>
+            <a:pPr algn="l" indent="0" marL="0">
+              <a:lnSpc>
+                <a:spcPct val="113000"/>
+              </a:lnSpc>
+              <a:buNone/>
+            </a:pPr>
+            <a:r>
+              <a:rPr lang="en-US" sz="1450" spc="7" kern="100" dirty="0">
+                <a:solidFill>
+                  <a:srgbClr val="C2C8D8"/>
+                </a:solidFill>
+                <a:latin typeface="Mozilla Text" pitchFamily="34" charset="0"/>
+                <a:ea typeface="Mozilla Text" pitchFamily="34" charset="-122"/>
+                <a:cs typeface="Mozilla Text" pitchFamily="34" charset="0"/>
+              </a:rPr>
+              <a:t>Campaign-linked activity is material enough to warrant deeper conversion and retention analysis.</a:t>
+            </a:r>
+            <a:endParaRPr lang="en-US" sz="1450" dirty="0"/>
+          </a:p>
+        </p:txBody>
+      </p:sp>
+    </p:spTree>
+  </p:cSld>
+  <p:clrMapOvr>
+    <a:masterClrMapping/>
+  </p:clrMapOvr>
+</p:sld>
+</file>
+
+<file path=ppt/slides/slide5.xml><?xml version="1.0" encoding="utf-8"?>
+<p:sld xmlns:a="http://schemas.openxmlformats.org/drawingml/2006/main" xmlns:r="http://schemas.openxmlformats.org/officeDocument/2006/relationships" xmlns:p="http://schemas.openxmlformats.org/presentationml/2006/main">
+  <p:cSld name="Slide 5">
+    <p:spTree>
+      <p:nvGrpSpPr>
+        <p:cNvPr id="1" name=""/>
+        <p:cNvGrpSpPr/>
+        <p:nvPr/>
+      </p:nvGrpSpPr>
+      <p:grpSpPr>
+        <a:xfrm>
+          <a:off x="0" y="0"/>
+          <a:ext cx="0" cy="0"/>
+          <a:chOff x="0" y="0"/>
+          <a:chExt cx="0" cy="0"/>
+        </a:xfrm>
+      </p:grpSpPr>
+      <p:sp>
+        <p:nvSpPr>
+          <p:cNvPr id="2" name="Text 0"/>
+          <p:cNvSpPr/>
+          <p:nvPr/>
+        </p:nvSpPr>
+        <p:spPr>
+          <a:xfrm>
+            <a:off x="609585" y="616268"/>
+            <a:ext cx="11582110" cy="220960"/>
+          </a:xfrm>
+          <a:prstGeom prst="rect">
+            <a:avLst/>
+          </a:prstGeom>
+          <a:noFill/>
+          <a:ln/>
+        </p:spPr>
+        <p:txBody>
+          <a:bodyPr wrap="none" lIns="0" tIns="0" rIns="0" bIns="0" rtlCol="0" anchor="t"/>
+          <a:lstStyle/>
+          <a:p>
+            <a:pPr algn="l" indent="0" marL="0">
+              <a:lnSpc>
+                <a:spcPct val="100000"/>
+              </a:lnSpc>
+              <a:buNone/>
+            </a:pPr>
+            <a:r>
+              <a:rPr lang="en-US" sz="1450" spc="29" kern="100" dirty="0">
+                <a:solidFill>
+                  <a:srgbClr val="F0609E"/>
+                </a:solidFill>
+                <a:latin typeface="Mozilla Text SemiBold" pitchFamily="34" charset="0"/>
+                <a:ea typeface="Mozilla Text SemiBold" pitchFamily="34" charset="-122"/>
+                <a:cs typeface="Mozilla Text SemiBold" pitchFamily="34" charset="0"/>
+              </a:rPr>
+              <a:t>REVENUE SIGNAL</a:t>
+            </a:r>
+            <a:endParaRPr lang="en-US" sz="1450" dirty="0"/>
+          </a:p>
+        </p:txBody>
+      </p:sp>
+      <p:sp>
+        <p:nvSpPr>
+          <p:cNvPr id="3" name="Text 1"/>
+          <p:cNvSpPr/>
+          <p:nvPr/>
+        </p:nvSpPr>
+        <p:spPr>
+          <a:xfrm>
+            <a:off x="609585" y="944834"/>
+            <a:ext cx="10972526" cy="987425"/>
+          </a:xfrm>
+          <a:prstGeom prst="rect">
+            <a:avLst/>
+          </a:prstGeom>
+          <a:noFill/>
+          <a:ln/>
+        </p:spPr>
+        <p:txBody>
+          <a:bodyPr wrap="square" lIns="0" tIns="0" rIns="0" bIns="0" rtlCol="0" anchor="t">
+            <a:normAutofit/>
+          </a:bodyPr>
+          <a:lstStyle/>
+          <a:p>
+            <a:pPr algn="l" indent="0" marL="0">
+              <a:lnSpc>
+                <a:spcPct val="90000"/>
+              </a:lnSpc>
+              <a:buNone/>
+            </a:pPr>
+            <a:r>
+              <a:rPr lang="en-US" sz="3600" b="1" spc="-18" kern="100" dirty="0">
+                <a:solidFill>
+                  <a:srgbClr val="F7F2E8"/>
+                </a:solidFill>
+                <a:latin typeface="Gantari Bold" pitchFamily="34" charset="0"/>
+                <a:ea typeface="Gantari Bold" pitchFamily="34" charset="-122"/>
+                <a:cs typeface="Gantari Bold" pitchFamily="34" charset="0"/>
+              </a:rPr>
+              <a:t>Campaign-linked revenue is meaningful, but not proof of lift</a:t>
+            </a:r>
+            <a:endParaRPr lang="en-US" sz="3600" dirty="0"/>
+          </a:p>
+        </p:txBody>
+      </p:sp>
+      <p:pic>
+        <p:nvPicPr>
+          <p:cNvPr id="4" name="Image 0" descr="preencoded.png">    </p:cNvPr>
+          <p:cNvPicPr>
+            <a:picLocks noChangeAspect="1"/>
+          </p:cNvPicPr>
+          <p:nvPr/>
+        </p:nvPicPr>
+        <p:blipFill>
+          <a:blip r:embed="rId1"/>
+          <a:stretch>
+            <a:fillRect/>
+          </a:stretch>
+        </p:blipFill>
+        <p:spPr>
+          <a:xfrm>
+            <a:off x="609585" y="2615505"/>
+            <a:ext cx="5714857" cy="1905000"/>
+          </a:xfrm>
+          <a:prstGeom prst="rect">
+            <a:avLst/>
+          </a:prstGeom>
+        </p:spPr>
+      </p:pic>
+      <p:sp>
+        <p:nvSpPr>
+          <p:cNvPr id="5" name="Text 2"/>
+          <p:cNvSpPr/>
+          <p:nvPr/>
+        </p:nvSpPr>
+        <p:spPr>
+          <a:xfrm>
+            <a:off x="609585" y="4606230"/>
+            <a:ext cx="6400640" cy="248543"/>
+          </a:xfrm>
+          <a:prstGeom prst="rect">
+            <a:avLst/>
+          </a:prstGeom>
+          <a:noFill/>
+          <a:ln/>
+        </p:spPr>
+        <p:txBody>
+          <a:bodyPr wrap="none" lIns="0" tIns="0" rIns="0" bIns="0" rtlCol="0" anchor="t"/>
+          <a:lstStyle/>
+          <a:p>
+            <a:pPr algn="l" indent="0" marL="0">
+              <a:lnSpc>
+                <a:spcPct val="113000"/>
+              </a:lnSpc>
+              <a:buNone/>
+            </a:pPr>
+            <a:r>
+              <a:rPr lang="en-US" sz="1450" spc="7" kern="100" dirty="0">
+                <a:solidFill>
+                  <a:srgbClr val="C2C8D8"/>
+                </a:solidFill>
+                <a:latin typeface="Mozilla Text" pitchFamily="34" charset="0"/>
+                <a:ea typeface="Mozilla Text" pitchFamily="34" charset="-122"/>
+                <a:cs typeface="Mozilla Text" pitchFamily="34" charset="0"/>
+              </a:rPr>
+              <a:t>Campaign-linked revenue is 14.95% of total Q1 test revenue.</a:t>
+            </a:r>
+            <a:endParaRPr lang="en-US" sz="1450" dirty="0"/>
+          </a:p>
+        </p:txBody>
+      </p:sp>
+      <p:sp>
+        <p:nvSpPr>
+          <p:cNvPr id="6" name="Shape 3"/>
+          <p:cNvSpPr/>
+          <p:nvPr/>
+        </p:nvSpPr>
+        <p:spPr>
+          <a:xfrm>
+            <a:off x="7314918" y="2119610"/>
+            <a:ext cx="4267192" cy="3231059"/>
+          </a:xfrm>
+          <a:prstGeom prst="roundRect">
+            <a:avLst>
+              <a:gd name="adj" fmla="val 6014"/>
+            </a:avLst>
+          </a:prstGeom>
+          <a:solidFill>
+            <a:srgbClr val="16295A"/>
+          </a:solidFill>
+          <a:ln/>
+        </p:spPr>
+      </p:sp>
+      <p:sp>
+        <p:nvSpPr>
+          <p:cNvPr id="7" name="Text 4"/>
+          <p:cNvSpPr/>
+          <p:nvPr/>
+        </p:nvSpPr>
+        <p:spPr>
+          <a:xfrm>
+            <a:off x="7543512" y="2365673"/>
+            <a:ext cx="3810004" cy="603250"/>
+          </a:xfrm>
+          <a:prstGeom prst="rect">
+            <a:avLst/>
+          </a:prstGeom>
+          <a:noFill/>
+          <a:ln/>
+        </p:spPr>
+        <p:txBody>
+          <a:bodyPr wrap="none" lIns="0" tIns="0" rIns="0" bIns="0" rtlCol="0" anchor="t"/>
+          <a:lstStyle/>
+          <a:p>
+            <a:pPr algn="l" indent="0" marL="0">
+              <a:lnSpc>
+                <a:spcPct val="79000"/>
+              </a:lnSpc>
+              <a:buNone/>
+            </a:pPr>
+            <a:r>
+              <a:rPr lang="en-US" sz="5000" b="1" spc="-100" kern="100" dirty="0">
+                <a:solidFill>
+                  <a:srgbClr val="F0609E"/>
+                </a:solidFill>
+                <a:latin typeface="Gantari Bold" pitchFamily="34" charset="0"/>
+                <a:ea typeface="Gantari Bold" pitchFamily="34" charset="-122"/>
+                <a:cs typeface="Gantari Bold" pitchFamily="34" charset="0"/>
+              </a:rPr>
+              <a:t>₹10.82M</a:t>
+            </a:r>
+            <a:endParaRPr lang="en-US" sz="5000" dirty="0"/>
+          </a:p>
+        </p:txBody>
+      </p:sp>
+      <p:sp>
+        <p:nvSpPr>
+          <p:cNvPr id="8" name="Text 5"/>
+          <p:cNvSpPr/>
+          <p:nvPr/>
+        </p:nvSpPr>
+        <p:spPr>
+          <a:xfrm>
+            <a:off x="7543512" y="3030835"/>
+            <a:ext cx="3810004" cy="330200"/>
+          </a:xfrm>
+          <a:prstGeom prst="rect">
+            <a:avLst/>
+          </a:prstGeom>
+          <a:noFill/>
+          <a:ln/>
+        </p:spPr>
+        <p:txBody>
+          <a:bodyPr wrap="none" lIns="0" tIns="0" rIns="0" bIns="0" rtlCol="0" anchor="t"/>
+          <a:lstStyle/>
+          <a:p>
+            <a:pPr algn="l" indent="0" marL="0">
+              <a:lnSpc>
+                <a:spcPct val="108000"/>
+              </a:lnSpc>
+              <a:buNone/>
+            </a:pPr>
+            <a:r>
+              <a:rPr lang="en-US" sz="2000" dirty="0">
+                <a:solidFill>
+                  <a:srgbClr val="F7F2E8"/>
+                </a:solidFill>
+                <a:latin typeface="Mozilla Text Medium" pitchFamily="34" charset="0"/>
+                <a:ea typeface="Mozilla Text Medium" pitchFamily="34" charset="-122"/>
+                <a:cs typeface="Mozilla Text Medium" pitchFamily="34" charset="0"/>
+              </a:rPr>
+              <a:t>campaign-linked revenue</a:t>
+            </a:r>
+            <a:endParaRPr lang="en-US" sz="2000" dirty="0"/>
+          </a:p>
+        </p:txBody>
+      </p:sp>
+      <p:sp>
+        <p:nvSpPr>
+          <p:cNvPr id="9" name="Text 6"/>
+          <p:cNvSpPr/>
+          <p:nvPr/>
+        </p:nvSpPr>
+        <p:spPr>
+          <a:xfrm>
+            <a:off x="7543512" y="3513435"/>
+            <a:ext cx="3810004" cy="1659434"/>
+          </a:xfrm>
+          <a:prstGeom prst="rect">
+            <a:avLst/>
+          </a:prstGeom>
+          <a:noFill/>
+          <a:ln/>
+        </p:spPr>
+        <p:txBody>
+          <a:bodyPr wrap="square" lIns="0" tIns="0" rIns="0" bIns="0" rtlCol="0" anchor="t">
+            <a:normAutofit/>
+          </a:bodyPr>
+          <a:lstStyle/>
+          <a:p>
+            <a:pPr algn="l" indent="0" marL="0">
+              <a:lnSpc>
+                <a:spcPct val="118000"/>
+              </a:lnSpc>
+              <a:spcAft>
+                <a:spcPts val="950"/>
+              </a:spcAft>
+              <a:buNone/>
+            </a:pPr>
+            <a:r>
+              <a:rPr lang="en-US" sz="1700" b="1" dirty="0">
+                <a:solidFill>
+                  <a:srgbClr val="F7F2E8"/>
+                </a:solidFill>
+                <a:latin typeface="Mozilla Text Bold" pitchFamily="34" charset="0"/>
+                <a:ea typeface="Mozilla Text Bold" pitchFamily="34" charset="-122"/>
+                <a:cs typeface="Mozilla Text Bold" pitchFamily="34" charset="0"/>
+              </a:rPr>
+              <a:t>₹3.48M</a:t>
+            </a:r>
+            <a:pPr algn="l" indent="0" marL="0">
+              <a:lnSpc>
+                <a:spcPct val="118000"/>
+              </a:lnSpc>
+              <a:spcAft>
+                <a:spcPts val="950"/>
+              </a:spcAft>
+              <a:buNone/>
+            </a:pPr>
+            <a:r>
+              <a:rPr lang="en-US" sz="1700" dirty="0">
+                <a:solidFill>
+                  <a:srgbClr val="F7F2E8"/>
+                </a:solidFill>
+                <a:latin typeface="Mozilla Text" pitchFamily="34" charset="0"/>
+                <a:ea typeface="Mozilla Text" pitchFamily="34" charset="-122"/>
+                <a:cs typeface="Mozilla Text" pitchFamily="34" charset="0"/>
+              </a:rPr>
+              <a:t> came from 1,767 new patients using the campaign waiver, across 5,045 tests.</a:t>
+            </a:r>
+            <a:endParaRPr lang="en-US" sz="1700" dirty="0"/>
+          </a:p>
+          <a:p>
+            <a:pPr algn="l" indent="0" marL="0">
+              <a:lnSpc>
+                <a:spcPct val="118000"/>
+              </a:lnSpc>
+              <a:buNone/>
+            </a:pPr>
+            <a:r>
+              <a:rPr lang="en-US" sz="1700" b="1" dirty="0">
+                <a:solidFill>
+                  <a:srgbClr val="F7F2E8"/>
+                </a:solidFill>
+                <a:latin typeface="Mozilla Text Bold" pitchFamily="34" charset="0"/>
+                <a:ea typeface="Mozilla Text Bold" pitchFamily="34" charset="-122"/>
+                <a:cs typeface="Mozilla Text Bold" pitchFamily="34" charset="0"/>
+              </a:rPr>
+              <a:t>32.15%</a:t>
+            </a:r>
+            <a:pPr algn="l" indent="0" marL="0">
+              <a:lnSpc>
+                <a:spcPct val="118000"/>
+              </a:lnSpc>
+              <a:buNone/>
+            </a:pPr>
+            <a:r>
+              <a:rPr lang="en-US" sz="1700" dirty="0">
+                <a:solidFill>
+                  <a:srgbClr val="F7F2E8"/>
+                </a:solidFill>
+                <a:latin typeface="Mozilla Text" pitchFamily="34" charset="0"/>
+                <a:ea typeface="Mozilla Text" pitchFamily="34" charset="-122"/>
+                <a:cs typeface="Mozilla Text" pitchFamily="34" charset="0"/>
+              </a:rPr>
+              <a:t> of campaign-linked revenue came from these new patients.</a:t>
+            </a:r>
+            <a:endParaRPr lang="en-US" sz="1700" dirty="0"/>
+          </a:p>
+        </p:txBody>
+      </p:sp>
+      <p:sp>
+        <p:nvSpPr>
+          <p:cNvPr id="10" name="Shape 7"/>
+          <p:cNvSpPr/>
+          <p:nvPr/>
+        </p:nvSpPr>
+        <p:spPr>
+          <a:xfrm>
+            <a:off x="609585" y="5544344"/>
+            <a:ext cx="10972526" cy="1117600"/>
+          </a:xfrm>
+          <a:prstGeom prst="roundRect">
+            <a:avLst>
+              <a:gd name="adj" fmla="val 17386"/>
+            </a:avLst>
+          </a:prstGeom>
+          <a:solidFill>
+            <a:srgbClr val="F4C531"/>
+          </a:solidFill>
+          <a:ln/>
+        </p:spPr>
+      </p:sp>
+      <p:sp>
+        <p:nvSpPr>
+          <p:cNvPr id="11" name="Text 8"/>
+          <p:cNvSpPr/>
+          <p:nvPr/>
+        </p:nvSpPr>
+        <p:spPr>
+          <a:xfrm>
+            <a:off x="838179" y="5776119"/>
+            <a:ext cx="10515337" cy="660400"/>
+          </a:xfrm>
+          <a:prstGeom prst="rect">
+            <a:avLst/>
+          </a:prstGeom>
+          <a:noFill/>
+          <a:ln/>
+        </p:spPr>
+        <p:txBody>
+          <a:bodyPr wrap="square" lIns="0" tIns="0" rIns="0" bIns="0" rtlCol="0" anchor="t">
+            <a:normAutofit/>
+          </a:bodyPr>
+          <a:lstStyle/>
+          <a:p>
+            <a:pPr algn="l" indent="0" marL="0">
+              <a:lnSpc>
+                <a:spcPct val="108000"/>
+              </a:lnSpc>
+              <a:buNone/>
+            </a:pPr>
+            <a:r>
+              <a:rPr lang="en-US" sz="2000" dirty="0">
+                <a:solidFill>
+                  <a:srgbClr val="000000"/>
+                </a:solidFill>
+                <a:latin typeface="Mozilla Text Medium" pitchFamily="34" charset="0"/>
+                <a:ea typeface="Mozilla Text Medium" pitchFamily="34" charset="-122"/>
+                <a:cs typeface="Mozilla Text Medium" pitchFamily="34" charset="0"/>
+              </a:rPr>
+              <a:t>Association is visible; incremental revenue, profit, and campaign ROI remain unproven.</a:t>
+            </a:r>
+            <a:endParaRPr lang="en-US" sz="2000" dirty="0"/>
+          </a:p>
+        </p:txBody>
+      </p:sp>
+    </p:spTree>
+  </p:cSld>
+  <p:clrMapOvr>
+    <a:masterClrMapping/>
+  </p:clrMapOvr>
+</p:sld>
+</file>
+
+<file path=ppt/slides/slide6.xml><?xml version="1.0" encoding="utf-8"?>
+<p:sld xmlns:a="http://schemas.openxmlformats.org/drawingml/2006/main" xmlns:r="http://schemas.openxmlformats.org/officeDocument/2006/relationships" xmlns:p="http://schemas.openxmlformats.org/presentationml/2006/main">
+  <p:cSld name="Slide 6">
+    <p:spTree>
+      <p:nvGrpSpPr>
+        <p:cNvPr id="1" name=""/>
+        <p:cNvGrpSpPr/>
+        <p:nvPr/>
+      </p:nvGrpSpPr>
+      <p:grpSpPr>
+        <a:xfrm>
+          <a:off x="0" y="0"/>
+          <a:ext cx="0" cy="0"/>
+          <a:chOff x="0" y="0"/>
+          <a:chExt cx="0" cy="0"/>
+        </a:xfrm>
+      </p:grpSpPr>
+      <p:sp>
+        <p:nvSpPr>
+          <p:cNvPr id="2" name="Text 0"/>
+          <p:cNvSpPr/>
+          <p:nvPr/>
+        </p:nvSpPr>
+        <p:spPr>
+          <a:xfrm>
+            <a:off x="609585" y="616268"/>
+            <a:ext cx="11582110" cy="220960"/>
+          </a:xfrm>
+          <a:prstGeom prst="rect">
+            <a:avLst/>
+          </a:prstGeom>
+          <a:noFill/>
+          <a:ln/>
+        </p:spPr>
+        <p:txBody>
+          <a:bodyPr wrap="none" lIns="0" tIns="0" rIns="0" bIns="0" rtlCol="0" anchor="t"/>
+          <a:lstStyle/>
+          <a:p>
+            <a:pPr algn="l" indent="0" marL="0">
+              <a:lnSpc>
+                <a:spcPct val="100000"/>
+              </a:lnSpc>
+              <a:buNone/>
+            </a:pPr>
+            <a:r>
+              <a:rPr lang="en-US" sz="1450" spc="29" kern="100" dirty="0">
+                <a:solidFill>
+                  <a:srgbClr val="F0609E"/>
+                </a:solidFill>
+                <a:latin typeface="Mozilla Text SemiBold" pitchFamily="34" charset="0"/>
+                <a:ea typeface="Mozilla Text SemiBold" pitchFamily="34" charset="-122"/>
+                <a:cs typeface="Mozilla Text SemiBold" pitchFamily="34" charset="0"/>
+              </a:rPr>
+              <a:t>DECISION PATH</a:t>
+            </a:r>
+            <a:endParaRPr lang="en-US" sz="1450" dirty="0"/>
+          </a:p>
+        </p:txBody>
+      </p:sp>
+      <p:sp>
+        <p:nvSpPr>
+          <p:cNvPr id="3" name="Text 1"/>
+          <p:cNvSpPr/>
+          <p:nvPr/>
+        </p:nvSpPr>
+        <p:spPr>
+          <a:xfrm>
+            <a:off x="609585" y="944834"/>
+            <a:ext cx="10972526" cy="987425"/>
+          </a:xfrm>
+          <a:prstGeom prst="rect">
+            <a:avLst/>
+          </a:prstGeom>
+          <a:noFill/>
+          <a:ln/>
+        </p:spPr>
+        <p:txBody>
+          <a:bodyPr wrap="square" lIns="0" tIns="0" rIns="0" bIns="0" rtlCol="0" anchor="t">
+            <a:normAutofit/>
+          </a:bodyPr>
+          <a:lstStyle/>
+          <a:p>
+            <a:pPr algn="l" indent="0" marL="0">
+              <a:lnSpc>
+                <a:spcPct val="90000"/>
+              </a:lnSpc>
+              <a:buNone/>
+            </a:pPr>
+            <a:r>
+              <a:rPr lang="en-US" sz="3600" b="1" spc="-18" kern="100" dirty="0">
+                <a:solidFill>
+                  <a:srgbClr val="F7F2E8"/>
+                </a:solidFill>
+                <a:latin typeface="Gantari Bold" pitchFamily="34" charset="0"/>
+                <a:ea typeface="Gantari Bold" pitchFamily="34" charset="-122"/>
+                <a:cs typeface="Gantari Bold" pitchFamily="34" charset="0"/>
+              </a:rPr>
+              <a:t>Act on the signal — measure incrementality before scaling spend</a:t>
+            </a:r>
+            <a:endParaRPr lang="en-US" sz="3600" dirty="0"/>
+          </a:p>
+        </p:txBody>
+      </p:sp>
+      <p:sp>
+        <p:nvSpPr>
+          <p:cNvPr id="4" name="Shape 2"/>
+          <p:cNvSpPr/>
+          <p:nvPr/>
+        </p:nvSpPr>
+        <p:spPr>
+          <a:xfrm>
+            <a:off x="609585" y="2119610"/>
+            <a:ext cx="507987" cy="508000"/>
+          </a:xfrm>
+          <a:prstGeom prst="ellipse">
+            <a:avLst/>
+          </a:prstGeom>
+          <a:solidFill>
+            <a:srgbClr val="F0609E"/>
+          </a:solidFill>
+          <a:ln/>
+        </p:spPr>
+      </p:sp>
+      <p:sp>
+        <p:nvSpPr>
+          <p:cNvPr id="5" name="Text 3"/>
+          <p:cNvSpPr/>
+          <p:nvPr/>
+        </p:nvSpPr>
+        <p:spPr>
+          <a:xfrm>
+            <a:off x="744916" y="2259310"/>
+            <a:ext cx="846910" cy="228600"/>
+          </a:xfrm>
+          <a:prstGeom prst="rect">
+            <a:avLst/>
+          </a:prstGeom>
+          <a:noFill/>
+          <a:ln/>
+        </p:spPr>
+        <p:txBody>
+          <a:bodyPr wrap="none" lIns="0" tIns="0" rIns="0" bIns="0" rtlCol="0" anchor="t"/>
+          <a:lstStyle/>
+          <a:p>
+            <a:pPr algn="l" indent="0" marL="0">
+              <a:lnSpc>
+                <a:spcPct val="83000"/>
+              </a:lnSpc>
+              <a:buNone/>
+            </a:pPr>
+            <a:r>
+              <a:rPr lang="en-US" sz="1800" b="1" dirty="0">
+                <a:solidFill>
+                  <a:srgbClr val="0E1F45"/>
+                </a:solidFill>
+                <a:latin typeface="Gantari Bold" pitchFamily="34" charset="0"/>
+                <a:ea typeface="Gantari Bold" pitchFamily="34" charset="-122"/>
+                <a:cs typeface="Gantari Bold" pitchFamily="34" charset="0"/>
+              </a:rPr>
+              <a:t>01</a:t>
+            </a:r>
+            <a:endParaRPr lang="en-US" sz="1800" dirty="0"/>
+          </a:p>
+        </p:txBody>
+      </p:sp>
+      <p:sp>
+        <p:nvSpPr>
+          <p:cNvPr id="6" name="Text 4"/>
+          <p:cNvSpPr/>
+          <p:nvPr/>
+        </p:nvSpPr>
+        <p:spPr>
+          <a:xfrm>
+            <a:off x="609585" y="2760266"/>
+            <a:ext cx="3454314" cy="330200"/>
+          </a:xfrm>
+          <a:prstGeom prst="rect">
+            <a:avLst/>
+          </a:prstGeom>
+          <a:noFill/>
+          <a:ln/>
+        </p:spPr>
+        <p:txBody>
+          <a:bodyPr wrap="none" lIns="0" tIns="0" rIns="0" bIns="0" rtlCol="0" anchor="t"/>
+          <a:lstStyle/>
+          <a:p>
+            <a:pPr algn="l" indent="0" marL="0">
+              <a:lnSpc>
+                <a:spcPct val="108000"/>
+              </a:lnSpc>
+              <a:buNone/>
+            </a:pPr>
+            <a:r>
+              <a:rPr lang="en-US" sz="2000" dirty="0">
+                <a:solidFill>
+                  <a:srgbClr val="F7F2E8"/>
+                </a:solidFill>
+                <a:latin typeface="Mozilla Text Medium" pitchFamily="34" charset="0"/>
+                <a:ea typeface="Mozilla Text Medium" pitchFamily="34" charset="-122"/>
+                <a:cs typeface="Mozilla Text Medium" pitchFamily="34" charset="0"/>
+              </a:rPr>
+              <a:t>Validate the funnel</a:t>
+            </a:r>
+            <a:endParaRPr lang="en-US" sz="2000" dirty="0"/>
+          </a:p>
+        </p:txBody>
+      </p:sp>
+      <p:sp>
+        <p:nvSpPr>
+          <p:cNvPr id="7" name="Text 5"/>
+          <p:cNvSpPr/>
+          <p:nvPr/>
+        </p:nvSpPr>
+        <p:spPr>
+          <a:xfrm>
+            <a:off x="609585" y="3242866"/>
+            <a:ext cx="3454314" cy="522883"/>
+          </a:xfrm>
+          <a:prstGeom prst="rect">
+            <a:avLst/>
+          </a:prstGeom>
+          <a:noFill/>
+          <a:ln/>
+        </p:spPr>
+        <p:txBody>
+          <a:bodyPr wrap="square" lIns="0" tIns="0" rIns="0" bIns="0" rtlCol="0" anchor="t">
+            <a:normAutofit/>
+          </a:bodyPr>
+          <a:lstStyle/>
+          <a:p>
+            <a:pPr algn="l" indent="0" marL="0">
+              <a:lnSpc>
+                <a:spcPct val="118000"/>
+              </a:lnSpc>
+              <a:buNone/>
+            </a:pPr>
+            <a:r>
+              <a:rPr lang="en-US" sz="1450" dirty="0">
+                <a:solidFill>
+                  <a:srgbClr val="F7F2E8"/>
+                </a:solidFill>
+                <a:latin typeface="Mozilla Text" pitchFamily="34" charset="0"/>
+                <a:ea typeface="Mozilla Text" pitchFamily="34" charset="-122"/>
+                <a:cs typeface="Mozilla Text" pitchFamily="34" charset="0"/>
+              </a:rPr>
+              <a:t>Waiver booking → new patient → tests → revenue.</a:t>
+            </a:r>
+            <a:endParaRPr lang="en-US" sz="1450" dirty="0"/>
+          </a:p>
+        </p:txBody>
+      </p:sp>
+      <p:sp>
+        <p:nvSpPr>
+          <p:cNvPr id="8" name="Shape 6"/>
+          <p:cNvSpPr/>
+          <p:nvPr/>
+        </p:nvSpPr>
+        <p:spPr>
+          <a:xfrm>
+            <a:off x="4368691" y="2119610"/>
+            <a:ext cx="507987" cy="508000"/>
+          </a:xfrm>
+          <a:prstGeom prst="ellipse">
+            <a:avLst/>
+          </a:prstGeom>
+          <a:solidFill>
+            <a:srgbClr val="F0609E"/>
+          </a:solidFill>
+          <a:ln/>
+        </p:spPr>
+      </p:sp>
+      <p:sp>
+        <p:nvSpPr>
+          <p:cNvPr id="9" name="Text 7"/>
+          <p:cNvSpPr/>
+          <p:nvPr/>
+        </p:nvSpPr>
+        <p:spPr>
+          <a:xfrm>
+            <a:off x="4490528" y="2259310"/>
+            <a:ext cx="873897" cy="228600"/>
+          </a:xfrm>
+          <a:prstGeom prst="rect">
+            <a:avLst/>
+          </a:prstGeom>
+          <a:noFill/>
+          <a:ln/>
+        </p:spPr>
+        <p:txBody>
+          <a:bodyPr wrap="none" lIns="0" tIns="0" rIns="0" bIns="0" rtlCol="0" anchor="t"/>
+          <a:lstStyle/>
+          <a:p>
+            <a:pPr algn="l" indent="0" marL="0">
+              <a:lnSpc>
+                <a:spcPct val="83000"/>
+              </a:lnSpc>
+              <a:buNone/>
+            </a:pPr>
+            <a:r>
+              <a:rPr lang="en-US" sz="1800" b="1" dirty="0">
+                <a:solidFill>
+                  <a:srgbClr val="0E1F45"/>
+                </a:solidFill>
+                <a:latin typeface="Gantari Bold" pitchFamily="34" charset="0"/>
+                <a:ea typeface="Gantari Bold" pitchFamily="34" charset="-122"/>
+                <a:cs typeface="Gantari Bold" pitchFamily="34" charset="0"/>
+              </a:rPr>
+              <a:t>02</a:t>
+            </a:r>
+            <a:endParaRPr lang="en-US" sz="1800" dirty="0"/>
+          </a:p>
+        </p:txBody>
+      </p:sp>
+      <p:sp>
+        <p:nvSpPr>
+          <p:cNvPr id="10" name="Text 8"/>
+          <p:cNvSpPr/>
+          <p:nvPr/>
+        </p:nvSpPr>
+        <p:spPr>
+          <a:xfrm>
+            <a:off x="4368691" y="2760266"/>
+            <a:ext cx="3454314" cy="330200"/>
+          </a:xfrm>
+          <a:prstGeom prst="rect">
+            <a:avLst/>
+          </a:prstGeom>
+          <a:noFill/>
+          <a:ln/>
+        </p:spPr>
+        <p:txBody>
+          <a:bodyPr wrap="none" lIns="0" tIns="0" rIns="0" bIns="0" rtlCol="0" anchor="t"/>
+          <a:lstStyle/>
+          <a:p>
+            <a:pPr algn="l" indent="0" marL="0">
+              <a:lnSpc>
+                <a:spcPct val="108000"/>
+              </a:lnSpc>
+              <a:buNone/>
+            </a:pPr>
+            <a:r>
+              <a:rPr lang="en-US" sz="2000" dirty="0">
+                <a:solidFill>
+                  <a:srgbClr val="F7F2E8"/>
+                </a:solidFill>
+                <a:latin typeface="Mozilla Text Medium" pitchFamily="34" charset="0"/>
+                <a:ea typeface="Mozilla Text Medium" pitchFamily="34" charset="-122"/>
+                <a:cs typeface="Mozilla Text Medium" pitchFamily="34" charset="0"/>
+              </a:rPr>
+              <a:t>Test the counterfactual</a:t>
+            </a:r>
+            <a:endParaRPr lang="en-US" sz="2000" dirty="0"/>
+          </a:p>
+        </p:txBody>
+      </p:sp>
+      <p:sp>
+        <p:nvSpPr>
+          <p:cNvPr id="11" name="Text 9"/>
+          <p:cNvSpPr/>
+          <p:nvPr/>
+        </p:nvSpPr>
+        <p:spPr>
+          <a:xfrm>
+            <a:off x="4368691" y="3242866"/>
+            <a:ext cx="3454314" cy="522883"/>
+          </a:xfrm>
+          <a:prstGeom prst="rect">
+            <a:avLst/>
+          </a:prstGeom>
+          <a:noFill/>
+          <a:ln/>
+        </p:spPr>
+        <p:txBody>
+          <a:bodyPr wrap="square" lIns="0" tIns="0" rIns="0" bIns="0" rtlCol="0" anchor="t">
+            <a:normAutofit/>
+          </a:bodyPr>
+          <a:lstStyle/>
+          <a:p>
+            <a:pPr algn="l" indent="0" marL="0">
+              <a:lnSpc>
+                <a:spcPct val="118000"/>
+              </a:lnSpc>
+              <a:buNone/>
+            </a:pPr>
+            <a:r>
+              <a:rPr lang="en-US" sz="1450" dirty="0">
+                <a:solidFill>
+                  <a:srgbClr val="F7F2E8"/>
+                </a:solidFill>
+                <a:latin typeface="Mozilla Text" pitchFamily="34" charset="0"/>
+                <a:ea typeface="Mozilla Text" pitchFamily="34" charset="-122"/>
+                <a:cs typeface="Mozilla Text" pitchFamily="34" charset="0"/>
+              </a:rPr>
+              <a:t>Compare exposed patients with a matched or holdout group.</a:t>
+            </a:r>
+            <a:endParaRPr lang="en-US" sz="1450" dirty="0"/>
+          </a:p>
+        </p:txBody>
+      </p:sp>
+      <p:sp>
+        <p:nvSpPr>
+          <p:cNvPr id="12" name="Shape 10"/>
+          <p:cNvSpPr/>
+          <p:nvPr/>
+        </p:nvSpPr>
+        <p:spPr>
+          <a:xfrm>
+            <a:off x="8127797" y="2119610"/>
+            <a:ext cx="507987" cy="508000"/>
+          </a:xfrm>
+          <a:prstGeom prst="ellipse">
+            <a:avLst/>
+          </a:prstGeom>
+          <a:solidFill>
+            <a:srgbClr val="FF8A3D"/>
+          </a:solidFill>
+          <a:ln/>
+        </p:spPr>
+      </p:sp>
+      <p:sp>
+        <p:nvSpPr>
+          <p:cNvPr id="13" name="Text 11"/>
+          <p:cNvSpPr/>
+          <p:nvPr/>
+        </p:nvSpPr>
+        <p:spPr>
+          <a:xfrm>
+            <a:off x="8249634" y="2259310"/>
+            <a:ext cx="873897" cy="228600"/>
+          </a:xfrm>
+          <a:prstGeom prst="rect">
+            <a:avLst/>
+          </a:prstGeom>
+          <a:noFill/>
+          <a:ln/>
+        </p:spPr>
+        <p:txBody>
+          <a:bodyPr wrap="none" lIns="0" tIns="0" rIns="0" bIns="0" rtlCol="0" anchor="t"/>
+          <a:lstStyle/>
+          <a:p>
+            <a:pPr algn="l" indent="0" marL="0">
+              <a:lnSpc>
+                <a:spcPct val="83000"/>
+              </a:lnSpc>
+              <a:buNone/>
+            </a:pPr>
+            <a:r>
+              <a:rPr lang="en-US" sz="1800" b="1" dirty="0">
+                <a:solidFill>
+                  <a:srgbClr val="0E1F45"/>
+                </a:solidFill>
+                <a:latin typeface="Gantari Bold" pitchFamily="34" charset="0"/>
+                <a:ea typeface="Gantari Bold" pitchFamily="34" charset="-122"/>
+                <a:cs typeface="Gantari Bold" pitchFamily="34" charset="0"/>
+              </a:rPr>
+              <a:t>03</a:t>
+            </a:r>
+            <a:endParaRPr lang="en-US" sz="1800" dirty="0"/>
+          </a:p>
+        </p:txBody>
+      </p:sp>
+      <p:sp>
+        <p:nvSpPr>
+          <p:cNvPr id="14" name="Text 12"/>
+          <p:cNvSpPr/>
+          <p:nvPr/>
+        </p:nvSpPr>
+        <p:spPr>
+          <a:xfrm>
+            <a:off x="8127797" y="2760266"/>
+            <a:ext cx="3454314" cy="330200"/>
+          </a:xfrm>
+          <a:prstGeom prst="rect">
+            <a:avLst/>
+          </a:prstGeom>
+          <a:noFill/>
+          <a:ln/>
+        </p:spPr>
+        <p:txBody>
+          <a:bodyPr wrap="none" lIns="0" tIns="0" rIns="0" bIns="0" rtlCol="0" anchor="t"/>
+          <a:lstStyle/>
+          <a:p>
+            <a:pPr algn="l" indent="0" marL="0">
+              <a:lnSpc>
+                <a:spcPct val="108000"/>
+              </a:lnSpc>
+              <a:buNone/>
+            </a:pPr>
+            <a:r>
+              <a:rPr lang="en-US" sz="2000" dirty="0">
+                <a:solidFill>
+                  <a:srgbClr val="F7F2E8"/>
+                </a:solidFill>
+                <a:latin typeface="Mozilla Text Medium" pitchFamily="34" charset="0"/>
+                <a:ea typeface="Mozilla Text Medium" pitchFamily="34" charset="-122"/>
+                <a:cs typeface="Mozilla Text Medium" pitchFamily="34" charset="0"/>
+              </a:rPr>
+              <a:t>Measure value</a:t>
+            </a:r>
+            <a:endParaRPr lang="en-US" sz="2000" dirty="0"/>
+          </a:p>
+        </p:txBody>
+      </p:sp>
+      <p:sp>
+        <p:nvSpPr>
+          <p:cNvPr id="15" name="Text 13"/>
+          <p:cNvSpPr/>
+          <p:nvPr/>
+        </p:nvSpPr>
+        <p:spPr>
+          <a:xfrm>
+            <a:off x="8127797" y="3242866"/>
+            <a:ext cx="3454314" cy="522883"/>
+          </a:xfrm>
+          <a:prstGeom prst="rect">
+            <a:avLst/>
+          </a:prstGeom>
+          <a:noFill/>
+          <a:ln/>
+        </p:spPr>
+        <p:txBody>
+          <a:bodyPr wrap="square" lIns="0" tIns="0" rIns="0" bIns="0" rtlCol="0" anchor="t">
+            <a:normAutofit/>
+          </a:bodyPr>
+          <a:lstStyle/>
+          <a:p>
+            <a:pPr algn="l" indent="0" marL="0">
+              <a:lnSpc>
+                <a:spcPct val="118000"/>
+              </a:lnSpc>
+              <a:buNone/>
+            </a:pPr>
+            <a:r>
+              <a:rPr lang="en-US" sz="1450" dirty="0">
+                <a:solidFill>
+                  <a:srgbClr val="F7F2E8"/>
+                </a:solidFill>
+                <a:latin typeface="Mozilla Text" pitchFamily="34" charset="0"/>
+                <a:ea typeface="Mozilla Text" pitchFamily="34" charset="-122"/>
+                <a:cs typeface="Mozilla Text" pitchFamily="34" charset="0"/>
+              </a:rPr>
+              <a:t>Add campaign cost, gross margin, and retention.</a:t>
+            </a:r>
+            <a:endParaRPr lang="en-US" sz="1450" dirty="0"/>
+          </a:p>
+        </p:txBody>
+      </p:sp>
+      <p:sp>
+        <p:nvSpPr>
+          <p:cNvPr id="16" name="Shape 14"/>
+          <p:cNvSpPr/>
+          <p:nvPr/>
+        </p:nvSpPr>
+        <p:spPr>
+          <a:xfrm>
+            <a:off x="609585" y="3994348"/>
+            <a:ext cx="10972526" cy="1117600"/>
+          </a:xfrm>
+          <a:prstGeom prst="roundRect">
+            <a:avLst>
+              <a:gd name="adj" fmla="val 17386"/>
+            </a:avLst>
+          </a:prstGeom>
+          <a:solidFill>
+            <a:srgbClr val="F4C531"/>
+          </a:solidFill>
+          <a:ln/>
+        </p:spPr>
+      </p:sp>
+      <p:sp>
+        <p:nvSpPr>
+          <p:cNvPr id="17" name="Text 15"/>
+          <p:cNvSpPr/>
+          <p:nvPr/>
+        </p:nvSpPr>
+        <p:spPr>
+          <a:xfrm>
+            <a:off x="838179" y="4226123"/>
+            <a:ext cx="10515337" cy="660400"/>
+          </a:xfrm>
+          <a:prstGeom prst="rect">
+            <a:avLst/>
+          </a:prstGeom>
+          <a:noFill/>
+          <a:ln/>
+        </p:spPr>
+        <p:txBody>
+          <a:bodyPr wrap="square" lIns="0" tIns="0" rIns="0" bIns="0" rtlCol="0" anchor="t">
+            <a:normAutofit/>
+          </a:bodyPr>
+          <a:lstStyle/>
+          <a:p>
+            <a:pPr algn="l" indent="0" marL="0">
+              <a:lnSpc>
+                <a:spcPct val="108000"/>
+              </a:lnSpc>
+              <a:buNone/>
+            </a:pPr>
+            <a:r>
+              <a:rPr lang="en-US" sz="2000" dirty="0">
+                <a:solidFill>
+                  <a:srgbClr val="000000"/>
+                </a:solidFill>
+                <a:latin typeface="Mozilla Text Medium" pitchFamily="34" charset="0"/>
+                <a:ea typeface="Mozilla Text Medium" pitchFamily="34" charset="-122"/>
+                <a:cs typeface="Mozilla Text Medium" pitchFamily="34" charset="0"/>
+              </a:rPr>
+              <a:t>Takeaway: campaign activity is large enough to optimize, but the next decision should be based on incremental value rather than attributed revenue alone.</a:t>
+            </a:r>
+            <a:endParaRPr lang="en-US" sz="2000" dirty="0"/>
+          </a:p>
+        </p:txBody>
+      </p:sp>
+    </p:spTree>
+  </p:cSld>
+  <p:clrMapOvr>
+    <a:masterClrMapping/>
+  </p:clrMapOvr>
+</p:sld>
+</file>
+
 <file path=ppt/theme/theme1.xml><?xml version="1.0" encoding="utf-8"?>
 <a:theme xmlns:a="http://schemas.openxmlformats.org/drawingml/2006/main" name="Office Theme">
   <a:themeElements>
